--- a/Topic_A/Exam_Practice/AT-A-L05_Speaking_Workshop_Eating_Out_Cafe_Menu_and_Prices.pptx
+++ b/Topic_A/Exam_Practice/AT-A-L05_Speaking_Workshop_Eating_Out_Cafe_Menu_and_Prices.pptx
@@ -615,7 +615,11 @@
           <a:lstStyle/>
           <a:p>
             <a:r>
-              <a:rPr lang="en-US" dirty="0"/>
+              <a:rPr lang="ar-SA" dirty="0">
+                <a:latin typeface="Amiri" pitchFamily="2" charset="-78"/>
+                <a:ea typeface="Amiri" pitchFamily="2" charset="-78"/>
+                <a:cs typeface="Amiri" pitchFamily="2" charset="-78"/>
+              </a:rPr>
               <a:t>ROLE PLAY C (Develop) — a problem in a restaurant.
 SET-UP IN THE BREAKOUT ROOM: A = examiner (reads the left column ONLY — the questions, in order), B = candidate (sees the task column; Core may use the help column), C = observer (ticks the feedback checklist). 1 minute preparation, about 3 minutes speaking, 1 minute feedback, then rotate.
 Task ! is the unexpected question: in the exam the candidate has not seen it — the examiner should read it without warning.
@@ -707,7 +711,11 @@
           <a:lstStyle/>
           <a:p>
             <a:r>
-              <a:rPr lang="en-US" dirty="0"/>
+              <a:rPr lang="ar-SA" dirty="0">
+                <a:latin typeface="Amiri" pitchFamily="2" charset="-78"/>
+                <a:ea typeface="Amiri" pitchFamily="2" charset="-78"/>
+                <a:cs typeface="Amiri" pitchFamily="2" charset="-78"/>
+              </a:rPr>
               <a:t>ROLE PLAY D (Stretch) — planning an end-of-year class meal.
 SET-UP IN THE BREAKOUT ROOM: A = examiner (reads the left column ONLY — the questions, in order), B = candidate (sees the task column; Core may use the help column), C = observer (ticks the feedback checklist). 1 minute preparation, about 3 minutes speaking, 1 minute feedback, then rotate.
 Task ! is the unexpected question: in the exam the candidate has not seen it — the examiner should read it without warning.
@@ -1243,7 +1251,11 @@
           <a:lstStyle/>
           <a:p>
             <a:r>
-              <a:rPr lang="en-US" dirty="0"/>
+              <a:rPr lang="ar-SA" dirty="0">
+                <a:latin typeface="Amiri" pitchFamily="2" charset="-78"/>
+                <a:ea typeface="Amiri" pitchFamily="2" charset="-78"/>
+                <a:cs typeface="Amiri" pitchFamily="2" charset="-78"/>
+              </a:rPr>
               <a:t>TOPIC CONVERSATION — Core. Examiner asks the questions in order and may add “لِمَاذَا؟ / هَلْ يُمْكِنُ أَنْ تَشْرَحَ أَكْثَرَ؟” to push for more. Candidate aims for one full sentence per question.
 </a:t>
             </a:r>
@@ -1332,7 +1344,11 @@
           <a:lstStyle/>
           <a:p>
             <a:r>
-              <a:rPr lang="en-US" dirty="0"/>
+              <a:rPr lang="ar-SA" dirty="0">
+                <a:latin typeface="Amiri" pitchFamily="2" charset="-78"/>
+                <a:ea typeface="Amiri" pitchFamily="2" charset="-78"/>
+                <a:cs typeface="Amiri" pitchFamily="2" charset="-78"/>
+              </a:rPr>
               <a:t>TOPIC CONVERSATION — Develop. Examiner asks the questions in order and may add “لِمَاذَا؟ / هَلْ يُمْكِنُ أَنْ تَشْرَحَ أَكْثَرَ؟” to push for more. Candidate aims for two or three sentences, with a reason, a price or a past event.
 </a:t>
             </a:r>
@@ -1421,7 +1437,11 @@
           <a:lstStyle/>
           <a:p>
             <a:r>
-              <a:rPr lang="en-US" dirty="0"/>
+              <a:rPr lang="ar-SA" dirty="0">
+                <a:latin typeface="Amiri" pitchFamily="2" charset="-78"/>
+                <a:ea typeface="Amiri" pitchFamily="2" charset="-78"/>
+                <a:cs typeface="Amiri" pitchFamily="2" charset="-78"/>
+              </a:rPr>
               <a:t>TOPIC CONVERSATION — Stretch. Examiner asks the questions in order and may add “لِمَاذَا؟ / هَلْ يُمْكِنُ أَنْ تَشْرَحَ أَكْثَرَ؟” to push for more. Candidate aims for a developed answer: opinion, comparison, an experience and a conditional.
 </a:t>
             </a:r>
@@ -1510,7 +1530,11 @@
           <a:lstStyle/>
           <a:p>
             <a:r>
-              <a:rPr lang="en-US" dirty="0"/>
+              <a:rPr lang="ar-SA" dirty="0">
+                <a:latin typeface="Amiri" pitchFamily="2" charset="-78"/>
+                <a:ea typeface="Amiri" pitchFamily="2" charset="-78"/>
+                <a:cs typeface="Amiri" pitchFamily="2" charset="-78"/>
+              </a:rPr>
               <a:t>WELCOME (1 min) — while students join.
 • Greet each student by name as they arrive: السَّلَامُ عَلَيْكُمْ. Take the register (Pastoral Tracker: attendance 0/1).
 • 2-MINUTE CHECK-IN (SEND training): a private chat to any student who seemed unsettled last lesson — “Are you okay today? 👍 / 👎”.
@@ -2224,7 +2248,11 @@
           <a:lstStyle/>
           <a:p>
             <a:r>
-              <a:rPr lang="en-US" dirty="0"/>
+              <a:rPr lang="ar-SA" dirty="0">
+                <a:latin typeface="Amiri" pitchFamily="2" charset="-78"/>
+                <a:ea typeface="Amiri" pitchFamily="2" charset="-78"/>
+                <a:cs typeface="Amiri" pitchFamily="2" charset="-78"/>
+              </a:rPr>
               <a:t>TEACH (3 min). Role play = precise and complete; conversation = develop. Choral repetition of the repair phrases. To a girl: تُعِيدِي.</a:t>
             </a:r>
             <a:endParaRPr lang="en-US" dirty="0"/>
@@ -2312,7 +2340,11 @@
           <a:lstStyle/>
           <a:p>
             <a:r>
-              <a:rPr lang="en-US" dirty="0"/>
+              <a:rPr lang="ar-SA" dirty="0">
+                <a:latin typeface="Amiri" pitchFamily="2" charset="-78"/>
+                <a:ea typeface="Amiri" pitchFamily="2" charset="-78"/>
+                <a:cs typeface="Amiri" pitchFamily="2" charset="-78"/>
+              </a:rPr>
               <a:t>LANGUAGE BANK (2 min) — four persons for each verb. The imperative changes with the person you speak to: أَعْطِنِي (to a man), أَعْطِينِي (to a woman), أَعْطُونِي (to a group). Always add مِنْ فَضْلِكَ / مِنْ فَضْلِكِ.</a:t>
             </a:r>
             <a:endParaRPr lang="en-US" dirty="0"/>
@@ -2400,7 +2432,11 @@
           <a:lstStyle/>
           <a:p>
             <a:r>
-              <a:rPr lang="en-US" dirty="0"/>
+              <a:rPr lang="ar-SA" dirty="0">
+                <a:latin typeface="Amiri" pitchFamily="2" charset="-78"/>
+                <a:ea typeface="Amiri" pitchFamily="2" charset="-78"/>
+                <a:cs typeface="Amiri" pitchFamily="2" charset="-78"/>
+              </a:rPr>
               <a:t>LANGUAGE BANK (2 min) — دِينَارٌ (1) · دِينَارَانِ (2) · ثَلَاثَةُ دَنَانِيرَ (3–10) · عِشْرُونَ دِينَارًا (11+). Adjectives agree: الطَّبَقُ غَالٍ / الوَجْبَةُ غَالِيَةٌ. Attached pronoun: كَمْ ثَمَنُهُ؟ (how much is it?).</a:t>
             </a:r>
             <a:endParaRPr lang="en-US" dirty="0"/>
@@ -2576,7 +2612,11 @@
           <a:lstStyle/>
           <a:p>
             <a:r>
-              <a:rPr lang="en-US" dirty="0"/>
+              <a:rPr lang="ar-SA" dirty="0">
+                <a:latin typeface="Amiri" pitchFamily="2" charset="-78"/>
+                <a:ea typeface="Amiri" pitchFamily="2" charset="-78"/>
+                <a:cs typeface="Amiri" pitchFamily="2" charset="-78"/>
+              </a:rPr>
               <a:t>ROLE PLAY A (Core) — in a café in Amman.
 SET-UP IN THE BREAKOUT ROOM: A = examiner (reads the left column ONLY — the questions, in order), B = candidate (sees the task column; Core may use the help column), C = observer (ticks the feedback checklist). 1 minute preparation, about 3 minutes speaking, 1 minute feedback, then rotate.
 Task ! is the unexpected question: in the exam the candidate has not seen it — the examiner should read it without warning.
@@ -2668,7 +2708,11 @@
           <a:lstStyle/>
           <a:p>
             <a:r>
-              <a:rPr lang="en-US" dirty="0"/>
+              <a:rPr lang="ar-SA" dirty="0">
+                <a:latin typeface="Amiri" pitchFamily="2" charset="-78"/>
+                <a:ea typeface="Amiri" pitchFamily="2" charset="-78"/>
+                <a:cs typeface="Amiri" pitchFamily="2" charset="-78"/>
+              </a:rPr>
               <a:t>ROLE PLAY B (Core+) — a phone call to a restaurant.
 SET-UP IN THE BREAKOUT ROOM: A = examiner (reads the left column ONLY — the questions, in order), B = candidate (sees the task column; Core may use the help column), C = observer (ticks the feedback checklist). 1 minute preparation, about 3 minutes speaking, 1 minute feedback, then rotate.
 Task ! is the unexpected question: in the exam the candidate has not seen it — the examiner should read it without warning.
@@ -3156,6 +3200,7 @@
                   <a:srgbClr val="D4AF37"/>
                 </a:solidFill>
                 <a:latin typeface="Amiri" pitchFamily="2" charset="-78"/>
+                <a:ea typeface="Amiri" pitchFamily="2" charset="-78"/>
                 <a:cs typeface="Amiri" pitchFamily="2" charset="-78"/>
               </a:rPr>
               <a:t>م</a:t>
@@ -3362,6 +3407,7 @@
                   <a:srgbClr val="D4AF37"/>
                 </a:solidFill>
                 <a:latin typeface="Amiri" pitchFamily="2" charset="-78"/>
+                <a:ea typeface="Amiri" pitchFamily="2" charset="-78"/>
                 <a:cs typeface="Amiri" pitchFamily="2" charset="-78"/>
               </a:rPr>
               <a:t>وَرْشَةُ التَّحَدُّثِ — فِي المَطْعَمِ وَالمَقْهَى</a:t>
@@ -3819,6 +3865,7 @@
                   <a:srgbClr val="D4AF37"/>
                 </a:solidFill>
                 <a:latin typeface="Amiri" pitchFamily="2" charset="-78"/>
+                <a:ea typeface="Amiri" pitchFamily="2" charset="-78"/>
                 <a:cs typeface="Amiri" pitchFamily="2" charset="-78"/>
               </a:rPr>
               <a:t>م</a:t>
@@ -4139,6 +4186,7 @@
                   <a:srgbClr val="8A6D1E"/>
                 </a:solidFill>
                 <a:latin typeface="Amiri" pitchFamily="2" charset="-78"/>
+                <a:ea typeface="Amiri" pitchFamily="2" charset="-78"/>
                 <a:cs typeface="Amiri" pitchFamily="2" charset="-78"/>
               </a:rPr>
               <a:t>مُشْكِلَةٌ فِي المَطْعَمِ</a:t>
@@ -4419,6 +4467,7 @@
                   <a:srgbClr val="1B3B6F"/>
                 </a:solidFill>
                 <a:latin typeface="Amiri" pitchFamily="2" charset="-78"/>
+                <a:ea typeface="Amiri" pitchFamily="2" charset="-78"/>
                 <a:cs typeface="Amiri" pitchFamily="2" charset="-78"/>
               </a:rPr>
               <a:t>عَفْوًا، … بَارِدَةٌ، وَأَنَا طَلَبْتُ …</a:t>
@@ -4495,6 +4544,7 @@
                   <a:srgbClr val="1B3B6F"/>
                 </a:solidFill>
                 <a:latin typeface="Amiri" pitchFamily="2" charset="-78"/>
+                <a:ea typeface="Amiri" pitchFamily="2" charset="-78"/>
                 <a:cs typeface="Amiri" pitchFamily="2" charset="-78"/>
               </a:rPr>
               <a:t>كَيْفَ الطَّعَامُ؟</a:t>
@@ -4598,6 +4648,7 @@
                   <a:srgbClr val="1B3B6F"/>
                 </a:solidFill>
                 <a:latin typeface="Amiri" pitchFamily="2" charset="-78"/>
+                <a:ea typeface="Amiri" pitchFamily="2" charset="-78"/>
                 <a:cs typeface="Amiri" pitchFamily="2" charset="-78"/>
               </a:rPr>
               <a:t>أَرْجُو أَنْ تُسَخِّنَهَا …</a:t>
@@ -4674,6 +4725,7 @@
                   <a:srgbClr val="1B3B6F"/>
                 </a:solidFill>
                 <a:latin typeface="Amiri" pitchFamily="2" charset="-78"/>
+                <a:ea typeface="Amiri" pitchFamily="2" charset="-78"/>
                 <a:cs typeface="Amiri" pitchFamily="2" charset="-78"/>
               </a:rPr>
               <a:t>أَعْتَذِرُ! مَاذَا تُرِيدُ أَنْ أَفْعَلَ؟</a:t>
@@ -4777,6 +4829,7 @@
                   <a:srgbClr val="1B3B6F"/>
                 </a:solidFill>
                 <a:latin typeface="Amiri" pitchFamily="2" charset="-78"/>
+                <a:ea typeface="Amiri" pitchFamily="2" charset="-78"/>
                 <a:cs typeface="Amiri" pitchFamily="2" charset="-78"/>
               </a:rPr>
               <a:t>طَلَبْتُ … مَعَ … وَ …</a:t>
@@ -4853,6 +4906,7 @@
                   <a:srgbClr val="1B3B6F"/>
                 </a:solidFill>
                 <a:latin typeface="Amiri" pitchFamily="2" charset="-78"/>
+                <a:ea typeface="Amiri" pitchFamily="2" charset="-78"/>
                 <a:cs typeface="Amiri" pitchFamily="2" charset="-78"/>
               </a:rPr>
               <a:t>مَاذَا طَلَبْتَ أَيْضًا؟</a:t>
@@ -4956,6 +5010,7 @@
                   <a:srgbClr val="1B3B6F"/>
                 </a:solidFill>
                 <a:latin typeface="Amiri" pitchFamily="2" charset="-78"/>
+                <a:ea typeface="Amiri" pitchFamily="2" charset="-78"/>
                 <a:cs typeface="Amiri" pitchFamily="2" charset="-78"/>
               </a:rPr>
               <a:t>هَلِ الخِدْمَةُ …؟</a:t>
@@ -5032,6 +5087,7 @@
                   <a:srgbClr val="1B3B6F"/>
                 </a:solidFill>
                 <a:latin typeface="Amiri" pitchFamily="2" charset="-78"/>
+                <a:ea typeface="Amiri" pitchFamily="2" charset="-78"/>
                 <a:cs typeface="Amiri" pitchFamily="2" charset="-78"/>
               </a:rPr>
               <a:t>… نَعَمْ، عَشَرَةٌ فِي المِئَةِ.</a:t>
@@ -5135,6 +5191,7 @@
                   <a:srgbClr val="1B3B6F"/>
                 </a:solidFill>
                 <a:latin typeface="Amiri" pitchFamily="2" charset="-78"/>
+                <a:ea typeface="Amiri" pitchFamily="2" charset="-78"/>
                 <a:cs typeface="Amiri" pitchFamily="2" charset="-78"/>
               </a:rPr>
               <a:t>نَعَمْ، سَأَرْجِعُ لِأَنَّ …</a:t>
@@ -5211,6 +5268,7 @@
                   <a:srgbClr val="1B3B6F"/>
                 </a:solidFill>
                 <a:latin typeface="Amiri" pitchFamily="2" charset="-78"/>
+                <a:ea typeface="Amiri" pitchFamily="2" charset="-78"/>
                 <a:cs typeface="Amiri" pitchFamily="2" charset="-78"/>
               </a:rPr>
               <a:t>هَلْ سَتَرْجِعُ إِلَى مَطْعَمِنَا؟</a:t>
@@ -5420,6 +5478,7 @@
                   <a:srgbClr val="D4AF37"/>
                 </a:solidFill>
                 <a:latin typeface="Amiri" pitchFamily="2" charset="-78"/>
+                <a:ea typeface="Amiri" pitchFamily="2" charset="-78"/>
                 <a:cs typeface="Amiri" pitchFamily="2" charset="-78"/>
               </a:rPr>
               <a:t>م</a:t>
@@ -5740,6 +5799,7 @@
                   <a:srgbClr val="8A6D1E"/>
                 </a:solidFill>
                 <a:latin typeface="Amiri" pitchFamily="2" charset="-78"/>
+                <a:ea typeface="Amiri" pitchFamily="2" charset="-78"/>
                 <a:cs typeface="Amiri" pitchFamily="2" charset="-78"/>
               </a:rPr>
               <a:t>وَجْبَةُ نِهَايَةِ السَّنَةِ</a:t>
@@ -6020,6 +6080,7 @@
                   <a:srgbClr val="1B3B6F"/>
                 </a:solidFill>
                 <a:latin typeface="Amiri" pitchFamily="2" charset="-78"/>
+                <a:ea typeface="Amiri" pitchFamily="2" charset="-78"/>
                 <a:cs typeface="Amiri" pitchFamily="2" charset="-78"/>
               </a:rPr>
               <a:t>سَيَأْتِي … طَالِبًا، وَمِيزَانِيَّتُنَا …</a:t>
@@ -6096,6 +6157,7 @@
                   <a:srgbClr val="1B3B6F"/>
                 </a:solidFill>
                 <a:latin typeface="Amiri" pitchFamily="2" charset="-78"/>
+                <a:ea typeface="Amiri" pitchFamily="2" charset="-78"/>
                 <a:cs typeface="Amiri" pitchFamily="2" charset="-78"/>
               </a:rPr>
               <a:t>كَمْ طَالِبًا سَيَأْتِي، وَمَا مِيزَانِيَّتُكُمْ؟</a:t>
@@ -6199,6 +6261,7 @@
                   <a:srgbClr val="1B3B6F"/>
                 </a:solidFill>
                 <a:latin typeface="Amiri" pitchFamily="2" charset="-78"/>
+                <a:ea typeface="Amiri" pitchFamily="2" charset="-78"/>
                 <a:cs typeface="Amiri" pitchFamily="2" charset="-78"/>
               </a:rPr>
               <a:t>نُفَضِّلُ … لِأَنَّهَا … وَلِأَنَّ …</a:t>
@@ -6275,6 +6338,7 @@
                   <a:srgbClr val="1B3B6F"/>
                 </a:solidFill>
                 <a:latin typeface="Amiri" pitchFamily="2" charset="-78"/>
+                <a:ea typeface="Amiri" pitchFamily="2" charset="-78"/>
                 <a:cs typeface="Amiri" pitchFamily="2" charset="-78"/>
               </a:rPr>
               <a:t>مَاذَا تُفَضِّلُونَ: الوَجَبَاتِ السَّرِيعَةَ أَمِ الأَطْبَاقَ العَرَبِيَّةَ؟</a:t>
@@ -6378,6 +6442,7 @@
                   <a:srgbClr val="1B3B6F"/>
                 </a:solidFill>
                 <a:latin typeface="Amiri" pitchFamily="2" charset="-78"/>
+                <a:ea typeface="Amiri" pitchFamily="2" charset="-78"/>
                 <a:cs typeface="Amiri" pitchFamily="2" charset="-78"/>
               </a:rPr>
               <a:t>فِي السَّنَةِ المَاضِيَةِ تَنَاوَلْنَا …</a:t>
@@ -6454,6 +6519,7 @@
                   <a:srgbClr val="1B3B6F"/>
                 </a:solidFill>
                 <a:latin typeface="Amiri" pitchFamily="2" charset="-78"/>
+                <a:ea typeface="Amiri" pitchFamily="2" charset="-78"/>
                 <a:cs typeface="Amiri" pitchFamily="2" charset="-78"/>
               </a:rPr>
               <a:t>هَلْ أَكَلْتُمْ مَعًا فِي مَطْعَمٍ مِنْ قَبْلُ؟</a:t>
@@ -6557,6 +6623,7 @@
                   <a:srgbClr val="1B3B6F"/>
                 </a:solidFill>
                 <a:latin typeface="Amiri" pitchFamily="2" charset="-78"/>
+                <a:ea typeface="Amiri" pitchFamily="2" charset="-78"/>
                 <a:cs typeface="Amiri" pitchFamily="2" charset="-78"/>
               </a:rPr>
               <a:t>فِي رَأْيِي، … أَهَمُّ مِنْ …</a:t>
@@ -6633,6 +6700,7 @@
                   <a:srgbClr val="1B3B6F"/>
                 </a:solidFill>
                 <a:latin typeface="Amiri" pitchFamily="2" charset="-78"/>
+                <a:ea typeface="Amiri" pitchFamily="2" charset="-78"/>
                 <a:cs typeface="Amiri" pitchFamily="2" charset="-78"/>
               </a:rPr>
               <a:t>مَا الَّذِي يَجْعَلُ المَطْعَمَ جَيِّدًا فِي رَأْيِكَ؟</a:t>
@@ -6736,6 +6804,7 @@
                   <a:srgbClr val="1B3B6F"/>
                 </a:solidFill>
                 <a:latin typeface="Amiri" pitchFamily="2" charset="-78"/>
+                <a:ea typeface="Amiri" pitchFamily="2" charset="-78"/>
                 <a:cs typeface="Amiri" pitchFamily="2" charset="-78"/>
               </a:rPr>
               <a:t>لَوْ كَانَتِ … لَطَلَبْنَا …</a:t>
@@ -6812,6 +6881,7 @@
                   <a:srgbClr val="1B3B6F"/>
                 </a:solidFill>
                 <a:latin typeface="Amiri" pitchFamily="2" charset="-78"/>
+                <a:ea typeface="Amiri" pitchFamily="2" charset="-78"/>
                 <a:cs typeface="Amiri" pitchFamily="2" charset="-78"/>
               </a:rPr>
               <a:t>لَوْ كَانَتِ المِيزَانِيَّةُ أَكْبَرَ، مَاذَا تَطْلُبُونَ؟</a:t>
@@ -7021,6 +7091,7 @@
                   <a:srgbClr val="D4AF37"/>
                 </a:solidFill>
                 <a:latin typeface="Amiri" pitchFamily="2" charset="-78"/>
+                <a:ea typeface="Amiri" pitchFamily="2" charset="-78"/>
                 <a:cs typeface="Amiri" pitchFamily="2" charset="-78"/>
               </a:rPr>
               <a:t>م</a:t>
@@ -7341,6 +7412,7 @@
                   <a:srgbClr val="8A6D1E"/>
                 </a:solidFill>
                 <a:latin typeface="Amiri" pitchFamily="2" charset="-78"/>
+                <a:ea typeface="Amiri" pitchFamily="2" charset="-78"/>
                 <a:cs typeface="Amiri" pitchFamily="2" charset="-78"/>
               </a:rPr>
               <a:t>وَرَقَةُ المُلَاحِظِ</a:t>
@@ -8811,6 +8883,7 @@
                   <a:srgbClr val="D4AF37"/>
                 </a:solidFill>
                 <a:latin typeface="Amiri" pitchFamily="2" charset="-78"/>
+                <a:ea typeface="Amiri" pitchFamily="2" charset="-78"/>
                 <a:cs typeface="Amiri" pitchFamily="2" charset="-78"/>
               </a:rPr>
               <a:t>م</a:t>
@@ -9131,6 +9204,7 @@
                   <a:srgbClr val="8A6D1E"/>
                 </a:solidFill>
                 <a:latin typeface="Amiri" pitchFamily="2" charset="-78"/>
+                <a:ea typeface="Amiri" pitchFamily="2" charset="-78"/>
                 <a:cs typeface="Amiri" pitchFamily="2" charset="-78"/>
               </a:rPr>
               <a:t>نَمُوذَجُ الإِجَابَةِ</a:t>
@@ -9373,6 +9447,7 @@
                   <a:srgbClr val="1B3B6F"/>
                 </a:solidFill>
                 <a:latin typeface="Amiri" pitchFamily="2" charset="-78"/>
+                <a:ea typeface="Amiri" pitchFamily="2" charset="-78"/>
                 <a:cs typeface="Amiri" pitchFamily="2" charset="-78"/>
               </a:rPr>
               <a:t>أُرِيدُ فِنْجَانَ شَايٍ وَقِطْعَةَ كَعْكٍ، مِنْ فَضْلِكَ.</a:t>
@@ -9449,6 +9524,7 @@
                   <a:srgbClr val="1B3B6F"/>
                 </a:solidFill>
                 <a:latin typeface="Amiri" pitchFamily="2" charset="-78"/>
+                <a:ea typeface="Amiri" pitchFamily="2" charset="-78"/>
                 <a:cs typeface="Amiri" pitchFamily="2" charset="-78"/>
               </a:rPr>
               <a:t>أَهْلًا وَسَهْلًا! مَاذَا تَطْلُبُ؟</a:t>
@@ -9552,6 +9628,7 @@
                   <a:srgbClr val="1B3B6F"/>
                 </a:solidFill>
                 <a:latin typeface="Amiri" pitchFamily="2" charset="-78"/>
+                <a:ea typeface="Amiri" pitchFamily="2" charset="-78"/>
                 <a:cs typeface="Amiri" pitchFamily="2" charset="-78"/>
               </a:rPr>
               <a:t>نَعَمْ، مِلْعَقَةً وَاحِدَةً، مِنْ فَضْلِكَ.</a:t>
@@ -9628,6 +9705,7 @@
                   <a:srgbClr val="1B3B6F"/>
                 </a:solidFill>
                 <a:latin typeface="Amiri" pitchFamily="2" charset="-78"/>
+                <a:ea typeface="Amiri" pitchFamily="2" charset="-78"/>
                 <a:cs typeface="Amiri" pitchFamily="2" charset="-78"/>
               </a:rPr>
               <a:t>هَلْ تُرِيدُ السُّكَّرَ؟</a:t>
@@ -9731,6 +9809,7 @@
                   <a:srgbClr val="1B3B6F"/>
                 </a:solidFill>
                 <a:latin typeface="Amiri" pitchFamily="2" charset="-78"/>
+                <a:ea typeface="Amiri" pitchFamily="2" charset="-78"/>
                 <a:cs typeface="Amiri" pitchFamily="2" charset="-78"/>
               </a:rPr>
               <a:t>كَمْ ثَمَنُ الكَعْكَةِ؟</a:t>
@@ -9807,6 +9886,7 @@
                   <a:srgbClr val="1B3B6F"/>
                 </a:solidFill>
                 <a:latin typeface="Amiri" pitchFamily="2" charset="-78"/>
+                <a:ea typeface="Amiri" pitchFamily="2" charset="-78"/>
                 <a:cs typeface="Amiri" pitchFamily="2" charset="-78"/>
               </a:rPr>
               <a:t>… دِينَارَانِ.</a:t>
@@ -9910,6 +9990,7 @@
                   <a:srgbClr val="1B3B6F"/>
                 </a:solidFill>
                 <a:latin typeface="Amiri" pitchFamily="2" charset="-78"/>
+                <a:ea typeface="Amiri" pitchFamily="2" charset="-78"/>
                 <a:cs typeface="Amiri" pitchFamily="2" charset="-78"/>
               </a:rPr>
               <a:t>أَجْلِسُ فِي الخَارِجِ، لِأَنَّ الجَوَّ جَمِيلٌ.</a:t>
@@ -9986,6 +10067,7 @@
                   <a:srgbClr val="1B3B6F"/>
                 </a:solidFill>
                 <a:latin typeface="Amiri" pitchFamily="2" charset="-78"/>
+                <a:ea typeface="Amiri" pitchFamily="2" charset="-78"/>
                 <a:cs typeface="Amiri" pitchFamily="2" charset="-78"/>
               </a:rPr>
               <a:t>هَلْ تَجْلِسُ فِي الدَّاخِلِ أَمْ فِي الخَارِجِ؟</a:t>
@@ -10089,6 +10171,7 @@
                   <a:srgbClr val="1B3B6F"/>
                 </a:solidFill>
                 <a:latin typeface="Amiri" pitchFamily="2" charset="-78"/>
+                <a:ea typeface="Amiri" pitchFamily="2" charset="-78"/>
                 <a:cs typeface="Amiri" pitchFamily="2" charset="-78"/>
               </a:rPr>
               <a:t>لَا، شُكْرًا. الحِسَابُ، مِنْ فَضْلِكَ.</a:t>
@@ -10165,6 +10248,7 @@
                   <a:srgbClr val="1B3B6F"/>
                 </a:solidFill>
                 <a:latin typeface="Amiri" pitchFamily="2" charset="-78"/>
+                <a:ea typeface="Amiri" pitchFamily="2" charset="-78"/>
                 <a:cs typeface="Amiri" pitchFamily="2" charset="-78"/>
               </a:rPr>
               <a:t>هَلْ تُرِيدُ شَيْئًا آخَرَ؟</a:t>
@@ -10374,6 +10458,7 @@
                   <a:srgbClr val="D4AF37"/>
                 </a:solidFill>
                 <a:latin typeface="Amiri" pitchFamily="2" charset="-78"/>
+                <a:ea typeface="Amiri" pitchFamily="2" charset="-78"/>
                 <a:cs typeface="Amiri" pitchFamily="2" charset="-78"/>
               </a:rPr>
               <a:t>م</a:t>
@@ -10694,6 +10779,7 @@
                   <a:srgbClr val="8A6D1E"/>
                 </a:solidFill>
                 <a:latin typeface="Amiri" pitchFamily="2" charset="-78"/>
+                <a:ea typeface="Amiri" pitchFamily="2" charset="-78"/>
                 <a:cs typeface="Amiri" pitchFamily="2" charset="-78"/>
               </a:rPr>
               <a:t>نَمُوذَجُ الإِجَابَةِ</a:t>
@@ -10936,6 +11022,7 @@
                   <a:srgbClr val="1B3B6F"/>
                 </a:solidFill>
                 <a:latin typeface="Amiri" pitchFamily="2" charset="-78"/>
+                <a:ea typeface="Amiri" pitchFamily="2" charset="-78"/>
                 <a:cs typeface="Amiri" pitchFamily="2" charset="-78"/>
               </a:rPr>
               <a:t>أُرِيدُ أَنْ أَحْجِزَ طَاوِلَةً، مِنْ فَضْلِكَ.</a:t>
@@ -11012,6 +11099,7 @@
                   <a:srgbClr val="1B3B6F"/>
                 </a:solidFill>
                 <a:latin typeface="Amiri" pitchFamily="2" charset="-78"/>
+                <a:ea typeface="Amiri" pitchFamily="2" charset="-78"/>
                 <a:cs typeface="Amiri" pitchFamily="2" charset="-78"/>
               </a:rPr>
               <a:t>مَطْعَمُ النَّخِيلِ، تَفَضَّلْ.</a:t>
@@ -11115,6 +11203,7 @@
                   <a:srgbClr val="1B3B6F"/>
                 </a:solidFill>
                 <a:latin typeface="Amiri" pitchFamily="2" charset="-78"/>
+                <a:ea typeface="Amiri" pitchFamily="2" charset="-78"/>
                 <a:cs typeface="Amiri" pitchFamily="2" charset="-78"/>
               </a:rPr>
               <a:t>لِخَمْسَةِ أَشْخَاصٍ.</a:t>
@@ -11191,6 +11280,7 @@
                   <a:srgbClr val="1B3B6F"/>
                 </a:solidFill>
                 <a:latin typeface="Amiri" pitchFamily="2" charset="-78"/>
+                <a:ea typeface="Amiri" pitchFamily="2" charset="-78"/>
                 <a:cs typeface="Amiri" pitchFamily="2" charset="-78"/>
               </a:rPr>
               <a:t>لِكَمْ شَخْصًا؟</a:t>
@@ -11294,6 +11384,7 @@
                   <a:srgbClr val="1B3B6F"/>
                 </a:solidFill>
                 <a:latin typeface="Amiri" pitchFamily="2" charset="-78"/>
+                <a:ea typeface="Amiri" pitchFamily="2" charset="-78"/>
                 <a:cs typeface="Amiri" pitchFamily="2" charset="-78"/>
               </a:rPr>
               <a:t>يَوْمَ الجُمُعَةِ، فِي السَّاعَةِ الثَّامِنَةِ مَسَاءً.</a:t>
@@ -11370,6 +11461,7 @@
                   <a:srgbClr val="1B3B6F"/>
                 </a:solidFill>
                 <a:latin typeface="Amiri" pitchFamily="2" charset="-78"/>
+                <a:ea typeface="Amiri" pitchFamily="2" charset="-78"/>
                 <a:cs typeface="Amiri" pitchFamily="2" charset="-78"/>
               </a:rPr>
               <a:t>فِي أَيِّ يَوْمٍ، وَفِي أَيِّ سَاعَةٍ؟</a:t>
@@ -11473,6 +11565,7 @@
                   <a:srgbClr val="1B3B6F"/>
                 </a:solidFill>
                 <a:latin typeface="Amiri" pitchFamily="2" charset="-78"/>
+                <a:ea typeface="Amiri" pitchFamily="2" charset="-78"/>
                 <a:cs typeface="Amiri" pitchFamily="2" charset="-78"/>
               </a:rPr>
               <a:t>هَلْ عِنْدَكُمْ أَطْبَاقٌ لِلْأَطْفَالِ؟</a:t>
@@ -11549,6 +11642,7 @@
                   <a:srgbClr val="1B3B6F"/>
                 </a:solidFill>
                 <a:latin typeface="Amiri" pitchFamily="2" charset="-78"/>
+                <a:ea typeface="Amiri" pitchFamily="2" charset="-78"/>
                 <a:cs typeface="Amiri" pitchFamily="2" charset="-78"/>
               </a:rPr>
               <a:t>… نَعَمْ، عِنْدَنَا قَائِمَةٌ خَاصَّةٌ لِلْأَطْفَالِ.</a:t>
@@ -11652,6 +11746,7 @@
                   <a:srgbClr val="1B3B6F"/>
                 </a:solidFill>
                 <a:latin typeface="Amiri" pitchFamily="2" charset="-78"/>
+                <a:ea typeface="Amiri" pitchFamily="2" charset="-78"/>
                 <a:cs typeface="Amiri" pitchFamily="2" charset="-78"/>
               </a:rPr>
               <a:t>الحَجْزُ بِاسْمِ آدَمَ حُسَيْنٍ، شُكْرًا لَكَ.</a:t>
@@ -11728,6 +11823,7 @@
                   <a:srgbClr val="1B3B6F"/>
                 </a:solidFill>
                 <a:latin typeface="Amiri" pitchFamily="2" charset="-78"/>
+                <a:ea typeface="Amiri" pitchFamily="2" charset="-78"/>
                 <a:cs typeface="Amiri" pitchFamily="2" charset="-78"/>
               </a:rPr>
               <a:t>مَا الاسْمُ، مِنْ فَضْلِكَ؟</a:t>
@@ -11937,6 +12033,7 @@
                   <a:srgbClr val="D4AF37"/>
                 </a:solidFill>
                 <a:latin typeface="Amiri" pitchFamily="2" charset="-78"/>
+                <a:ea typeface="Amiri" pitchFamily="2" charset="-78"/>
                 <a:cs typeface="Amiri" pitchFamily="2" charset="-78"/>
               </a:rPr>
               <a:t>م</a:t>
@@ -12257,6 +12354,7 @@
                   <a:srgbClr val="8A6D1E"/>
                 </a:solidFill>
                 <a:latin typeface="Amiri" pitchFamily="2" charset="-78"/>
+                <a:ea typeface="Amiri" pitchFamily="2" charset="-78"/>
                 <a:cs typeface="Amiri" pitchFamily="2" charset="-78"/>
               </a:rPr>
               <a:t>نَمُوذَجُ الإِجَابَةِ</a:t>
@@ -12499,6 +12597,7 @@
                   <a:srgbClr val="1B3B6F"/>
                 </a:solidFill>
                 <a:latin typeface="Amiri" pitchFamily="2" charset="-78"/>
+                <a:ea typeface="Amiri" pitchFamily="2" charset="-78"/>
                 <a:cs typeface="Amiri" pitchFamily="2" charset="-78"/>
               </a:rPr>
               <a:t>عَفْوًا، الشُّورْبَةُ بَارِدَةٌ، وَأَنَا طَلَبْتُ شُورْبَةً سَاخِنَةً.</a:t>
@@ -12575,6 +12674,7 @@
                   <a:srgbClr val="1B3B6F"/>
                 </a:solidFill>
                 <a:latin typeface="Amiri" pitchFamily="2" charset="-78"/>
+                <a:ea typeface="Amiri" pitchFamily="2" charset="-78"/>
                 <a:cs typeface="Amiri" pitchFamily="2" charset="-78"/>
               </a:rPr>
               <a:t>كَيْفَ الطَّعَامُ؟</a:t>
@@ -12678,6 +12778,7 @@
                   <a:srgbClr val="1B3B6F"/>
                 </a:solidFill>
                 <a:latin typeface="Amiri" pitchFamily="2" charset="-78"/>
+                <a:ea typeface="Amiri" pitchFamily="2" charset="-78"/>
                 <a:cs typeface="Amiri" pitchFamily="2" charset="-78"/>
               </a:rPr>
               <a:t>أَرْجُو أَنْ تُسَخِّنَهَا، أَوْ أَنْ تُحْضِرَ لِي طَبَقًا آخَرَ.</a:t>
@@ -12754,6 +12855,7 @@
                   <a:srgbClr val="1B3B6F"/>
                 </a:solidFill>
                 <a:latin typeface="Amiri" pitchFamily="2" charset="-78"/>
+                <a:ea typeface="Amiri" pitchFamily="2" charset="-78"/>
                 <a:cs typeface="Amiri" pitchFamily="2" charset="-78"/>
               </a:rPr>
               <a:t>أَعْتَذِرُ! مَاذَا تُرِيدُ أَنْ أَفْعَلَ؟</a:t>
@@ -12857,6 +12959,7 @@
                   <a:srgbClr val="1B3B6F"/>
                 </a:solidFill>
                 <a:latin typeface="Amiri" pitchFamily="2" charset="-78"/>
+                <a:ea typeface="Amiri" pitchFamily="2" charset="-78"/>
                 <a:cs typeface="Amiri" pitchFamily="2" charset="-78"/>
               </a:rPr>
               <a:t>طَلَبْتُ دَجَاجًا مَشْوِيًّا مَعَ الأُرْزِ، وَعَصِيرَ لَيْمُونٍ.</a:t>
@@ -12933,6 +13036,7 @@
                   <a:srgbClr val="1B3B6F"/>
                 </a:solidFill>
                 <a:latin typeface="Amiri" pitchFamily="2" charset="-78"/>
+                <a:ea typeface="Amiri" pitchFamily="2" charset="-78"/>
                 <a:cs typeface="Amiri" pitchFamily="2" charset="-78"/>
               </a:rPr>
               <a:t>مَاذَا طَلَبْتَ أَيْضًا؟</a:t>
@@ -13036,6 +13140,7 @@
                   <a:srgbClr val="1B3B6F"/>
                 </a:solidFill>
                 <a:latin typeface="Amiri" pitchFamily="2" charset="-78"/>
+                <a:ea typeface="Amiri" pitchFamily="2" charset="-78"/>
                 <a:cs typeface="Amiri" pitchFamily="2" charset="-78"/>
               </a:rPr>
               <a:t>هَلِ الخِدْمَةُ مَحْسُوبَةٌ فِي الفَاتُورَةِ؟</a:t>
@@ -13112,6 +13217,7 @@
                   <a:srgbClr val="1B3B6F"/>
                 </a:solidFill>
                 <a:latin typeface="Amiri" pitchFamily="2" charset="-78"/>
+                <a:ea typeface="Amiri" pitchFamily="2" charset="-78"/>
                 <a:cs typeface="Amiri" pitchFamily="2" charset="-78"/>
               </a:rPr>
               <a:t>… نَعَمْ، عَشَرَةٌ فِي المِئَةِ.</a:t>
@@ -13215,6 +13321,7 @@
                   <a:srgbClr val="1B3B6F"/>
                 </a:solidFill>
                 <a:latin typeface="Amiri" pitchFamily="2" charset="-78"/>
+                <a:ea typeface="Amiri" pitchFamily="2" charset="-78"/>
                 <a:cs typeface="Amiri" pitchFamily="2" charset="-78"/>
               </a:rPr>
               <a:t>نَعَمْ، سَأَرْجِعُ، لِأَنَّ الطَّعَامَ لَذِيذٌ وَالخِدْمَةَ سَرِيعَةٌ.</a:t>
@@ -13291,6 +13398,7 @@
                   <a:srgbClr val="1B3B6F"/>
                 </a:solidFill>
                 <a:latin typeface="Amiri" pitchFamily="2" charset="-78"/>
+                <a:ea typeface="Amiri" pitchFamily="2" charset="-78"/>
                 <a:cs typeface="Amiri" pitchFamily="2" charset="-78"/>
               </a:rPr>
               <a:t>هَلْ سَتَرْجِعُ إِلَى مَطْعَمِنَا؟</a:t>
@@ -13500,6 +13608,7 @@
                   <a:srgbClr val="D4AF37"/>
                 </a:solidFill>
                 <a:latin typeface="Amiri" pitchFamily="2" charset="-78"/>
+                <a:ea typeface="Amiri" pitchFamily="2" charset="-78"/>
                 <a:cs typeface="Amiri" pitchFamily="2" charset="-78"/>
               </a:rPr>
               <a:t>م</a:t>
@@ -13820,6 +13929,7 @@
                   <a:srgbClr val="8A6D1E"/>
                 </a:solidFill>
                 <a:latin typeface="Amiri" pitchFamily="2" charset="-78"/>
+                <a:ea typeface="Amiri" pitchFamily="2" charset="-78"/>
                 <a:cs typeface="Amiri" pitchFamily="2" charset="-78"/>
               </a:rPr>
               <a:t>نَمُوذَجُ الإِجَابَةِ</a:t>
@@ -14062,6 +14172,7 @@
                   <a:srgbClr val="1B3B6F"/>
                 </a:solidFill>
                 <a:latin typeface="Amiri" pitchFamily="2" charset="-78"/>
+                <a:ea typeface="Amiri" pitchFamily="2" charset="-78"/>
                 <a:cs typeface="Amiri" pitchFamily="2" charset="-78"/>
               </a:rPr>
               <a:t>سَيَأْتِي عِشْرُونَ طَالِبًا، وَمِيزَانِيَّتُنَا مِئَتَا دِينَارٍ تَقْرِيبًا.</a:t>
@@ -14138,6 +14249,7 @@
                   <a:srgbClr val="1B3B6F"/>
                 </a:solidFill>
                 <a:latin typeface="Amiri" pitchFamily="2" charset="-78"/>
+                <a:ea typeface="Amiri" pitchFamily="2" charset="-78"/>
                 <a:cs typeface="Amiri" pitchFamily="2" charset="-78"/>
               </a:rPr>
               <a:t>كَمْ طَالِبًا سَيَأْتِي، وَمَا مِيزَانِيَّتُكُمْ؟</a:t>
@@ -14241,6 +14353,7 @@
                   <a:srgbClr val="1B3B6F"/>
                 </a:solidFill>
                 <a:latin typeface="Amiri" pitchFamily="2" charset="-78"/>
+                <a:ea typeface="Amiri" pitchFamily="2" charset="-78"/>
                 <a:cs typeface="Amiri" pitchFamily="2" charset="-78"/>
               </a:rPr>
               <a:t>نُفَضِّلُ الأَطْبَاقَ العَرَبِيَّةَ، لِأَنَّهَا أَصَحُّ، وَلِأَنَّ بَعْضَ زُمَلَائِنَا لَا يَأْكُلُونَ الوَجَبَاتِ السَّرِيعَةَ.</a:t>
@@ -14320,6 +14433,7 @@
                   <a:srgbClr val="1B3B6F"/>
                 </a:solidFill>
                 <a:latin typeface="Amiri" pitchFamily="2" charset="-78"/>
+                <a:ea typeface="Amiri" pitchFamily="2" charset="-78"/>
                 <a:cs typeface="Amiri" pitchFamily="2" charset="-78"/>
               </a:rPr>
               <a:t>مَاذَا تُفَضِّلُونَ: الوَجَبَاتِ السَّرِيعَةَ أَمِ الأَطْبَاقَ العَرَبِيَّةَ؟</a:t>
@@ -14423,6 +14537,7 @@
                   <a:srgbClr val="1B3B6F"/>
                 </a:solidFill>
                 <a:latin typeface="Amiri" pitchFamily="2" charset="-78"/>
+                <a:ea typeface="Amiri" pitchFamily="2" charset="-78"/>
                 <a:cs typeface="Amiri" pitchFamily="2" charset="-78"/>
               </a:rPr>
               <a:t>نَعَمْ، فِي السَّنَةِ المَاضِيَةِ تَنَاوَلْنَا الغَدَاءَ فِي مَطْعَمٍ لُبْنَانِيٍّ، وَكَانَتِ التَّجْرِبَةُ رَائِعَةً.</a:t>
@@ -14499,6 +14614,7 @@
                   <a:srgbClr val="1B3B6F"/>
                 </a:solidFill>
                 <a:latin typeface="Amiri" pitchFamily="2" charset="-78"/>
+                <a:ea typeface="Amiri" pitchFamily="2" charset="-78"/>
                 <a:cs typeface="Amiri" pitchFamily="2" charset="-78"/>
               </a:rPr>
               <a:t>هَلْ أَكَلْتُمْ مَعًا فِي مَطْعَمٍ مِنْ قَبْلُ؟</a:t>
@@ -14602,6 +14718,7 @@
                   <a:srgbClr val="1B3B6F"/>
                 </a:solidFill>
                 <a:latin typeface="Amiri" pitchFamily="2" charset="-78"/>
+                <a:ea typeface="Amiri" pitchFamily="2" charset="-78"/>
                 <a:cs typeface="Amiri" pitchFamily="2" charset="-78"/>
               </a:rPr>
               <a:t>فِي رَأْيِي، الطَّعَامُ الطَّازَجُ وَالأَسْعَارُ المَعْقُولَةُ أَهَمُّ مِنَ الدِّيكُورِ الفَاخِرِ.</a:t>
@@ -14678,6 +14795,7 @@
                   <a:srgbClr val="1B3B6F"/>
                 </a:solidFill>
                 <a:latin typeface="Amiri" pitchFamily="2" charset="-78"/>
+                <a:ea typeface="Amiri" pitchFamily="2" charset="-78"/>
                 <a:cs typeface="Amiri" pitchFamily="2" charset="-78"/>
               </a:rPr>
               <a:t>مَا الَّذِي يَجْعَلُ المَطْعَمَ جَيِّدًا فِي رَأْيِكَ؟</a:t>
@@ -14781,6 +14899,7 @@
                   <a:srgbClr val="1B3B6F"/>
                 </a:solidFill>
                 <a:latin typeface="Amiri" pitchFamily="2" charset="-78"/>
+                <a:ea typeface="Amiri" pitchFamily="2" charset="-78"/>
                 <a:cs typeface="Amiri" pitchFamily="2" charset="-78"/>
               </a:rPr>
               <a:t>لَوْ كَانَتِ المِيزَانِيَّةُ أَكْبَرَ، لَطَلَبْنَا حَلْوَى خَاصَّةً وَكَعْكَةً كَبِيرَةً لِلِاحْتِفَالِ.</a:t>
@@ -14857,6 +14976,7 @@
                   <a:srgbClr val="1B3B6F"/>
                 </a:solidFill>
                 <a:latin typeface="Amiri" pitchFamily="2" charset="-78"/>
+                <a:ea typeface="Amiri" pitchFamily="2" charset="-78"/>
                 <a:cs typeface="Amiri" pitchFamily="2" charset="-78"/>
               </a:rPr>
               <a:t>لَوْ كَانَتِ المِيزَانِيَّةُ أَكْبَرَ، مَاذَا تَطْلُبُونَ؟</a:t>
@@ -15066,6 +15186,7 @@
                   <a:srgbClr val="D4AF37"/>
                 </a:solidFill>
                 <a:latin typeface="Amiri" pitchFamily="2" charset="-78"/>
+                <a:ea typeface="Amiri" pitchFamily="2" charset="-78"/>
                 <a:cs typeface="Amiri" pitchFamily="2" charset="-78"/>
               </a:rPr>
               <a:t>م</a:t>
@@ -15386,6 +15507,7 @@
                   <a:srgbClr val="8A6D1E"/>
                 </a:solidFill>
                 <a:latin typeface="Amiri" pitchFamily="2" charset="-78"/>
+                <a:ea typeface="Amiri" pitchFamily="2" charset="-78"/>
                 <a:cs typeface="Amiri" pitchFamily="2" charset="-78"/>
               </a:rPr>
               <a:t>فِي المَطْعَمِ</a:t>
@@ -15666,6 +15788,7 @@
                   <a:srgbClr val="1B3B6F"/>
                 </a:solidFill>
                 <a:latin typeface="Amiri" pitchFamily="2" charset="-78"/>
+                <a:ea typeface="Amiri" pitchFamily="2" charset="-78"/>
                 <a:cs typeface="Amiri" pitchFamily="2" charset="-78"/>
               </a:rPr>
               <a:t>نَعَمْ، أَذْهَبُ … مَرَّةً فِي …</a:t>
@@ -15742,6 +15865,7 @@
                   <a:srgbClr val="1B3B6F"/>
                 </a:solidFill>
                 <a:latin typeface="Amiri" pitchFamily="2" charset="-78"/>
+                <a:ea typeface="Amiri" pitchFamily="2" charset="-78"/>
                 <a:cs typeface="Amiri" pitchFamily="2" charset="-78"/>
               </a:rPr>
               <a:t>هَلْ تَذْهَبُ إِلَى المَطْعَمِ كَثِيرًا؟</a:t>
@@ -15910,6 +16034,7 @@
                   <a:srgbClr val="1B3B6F"/>
                 </a:solidFill>
                 <a:latin typeface="Amiri" pitchFamily="2" charset="-78"/>
+                <a:ea typeface="Amiri" pitchFamily="2" charset="-78"/>
                 <a:cs typeface="Amiri" pitchFamily="2" charset="-78"/>
               </a:rPr>
               <a:t>أَطْلُبُ عَادَةً …</a:t>
@@ -15986,6 +16111,7 @@
                   <a:srgbClr val="1B3B6F"/>
                 </a:solidFill>
                 <a:latin typeface="Amiri" pitchFamily="2" charset="-78"/>
+                <a:ea typeface="Amiri" pitchFamily="2" charset="-78"/>
                 <a:cs typeface="Amiri" pitchFamily="2" charset="-78"/>
               </a:rPr>
               <a:t>مَاذَا تَطْلُبُ عَادَةً فِي المَقْهَى؟</a:t>
@@ -16154,6 +16280,7 @@
                   <a:srgbClr val="1B3B6F"/>
                 </a:solidFill>
                 <a:latin typeface="Amiri" pitchFamily="2" charset="-78"/>
+                <a:ea typeface="Amiri" pitchFamily="2" charset="-78"/>
                 <a:cs typeface="Amiri" pitchFamily="2" charset="-78"/>
               </a:rPr>
               <a:t>مَطْعَمِي المُفَضَّلُ …</a:t>
@@ -16230,6 +16357,7 @@
                   <a:srgbClr val="1B3B6F"/>
                 </a:solidFill>
                 <a:latin typeface="Amiri" pitchFamily="2" charset="-78"/>
+                <a:ea typeface="Amiri" pitchFamily="2" charset="-78"/>
                 <a:cs typeface="Amiri" pitchFamily="2" charset="-78"/>
               </a:rPr>
               <a:t>مَا مَطْعَمُكَ المُفَضَّلُ؟</a:t>
@@ -16398,6 +16526,7 @@
                   <a:srgbClr val="1B3B6F"/>
                 </a:solidFill>
                 <a:latin typeface="Amiri" pitchFamily="2" charset="-78"/>
+                <a:ea typeface="Amiri" pitchFamily="2" charset="-78"/>
                 <a:cs typeface="Amiri" pitchFamily="2" charset="-78"/>
               </a:rPr>
               <a:t>أَذْهَبُ مَعَ …</a:t>
@@ -16474,6 +16603,7 @@
                   <a:srgbClr val="1B3B6F"/>
                 </a:solidFill>
                 <a:latin typeface="Amiri" pitchFamily="2" charset="-78"/>
+                <a:ea typeface="Amiri" pitchFamily="2" charset="-78"/>
                 <a:cs typeface="Amiri" pitchFamily="2" charset="-78"/>
               </a:rPr>
               <a:t>مَعَ مَنْ تَذْهَبُ؟</a:t>
@@ -16642,6 +16772,7 @@
                   <a:srgbClr val="1B3B6F"/>
                 </a:solidFill>
                 <a:latin typeface="Amiri" pitchFamily="2" charset="-78"/>
+                <a:ea typeface="Amiri" pitchFamily="2" charset="-78"/>
                 <a:cs typeface="Amiri" pitchFamily="2" charset="-78"/>
               </a:rPr>
               <a:t>نَعَمْ، بَعْضُ المَطَاعِمِ …</a:t>
@@ -16718,6 +16849,7 @@
                   <a:srgbClr val="1B3B6F"/>
                 </a:solidFill>
                 <a:latin typeface="Amiri" pitchFamily="2" charset="-78"/>
+                <a:ea typeface="Amiri" pitchFamily="2" charset="-78"/>
                 <a:cs typeface="Amiri" pitchFamily="2" charset="-78"/>
               </a:rPr>
               <a:t>هَلِ المَطَاعِمُ غَالِيَةٌ؟</a:t>
@@ -16872,6 +17004,7 @@
                   <a:srgbClr val="1B3B6F"/>
                 </a:solidFill>
                 <a:latin typeface="Amiri" pitchFamily="2" charset="-78"/>
+                <a:ea typeface="Amiri" pitchFamily="2" charset="-78"/>
                 <a:cs typeface="Amiri" pitchFamily="2" charset="-78"/>
               </a:rPr>
               <a:t>عَفْوًا، هَلْ يُمْكِنُ أَنْ تُعِيدَ السُّؤَالَ؟</a:t>
@@ -17005,6 +17138,7 @@
                   <a:srgbClr val="D4AF37"/>
                 </a:solidFill>
                 <a:latin typeface="Amiri" pitchFamily="2" charset="-78"/>
+                <a:ea typeface="Amiri" pitchFamily="2" charset="-78"/>
                 <a:cs typeface="Amiri" pitchFamily="2" charset="-78"/>
               </a:rPr>
               <a:t>م</a:t>
@@ -17325,6 +17459,7 @@
                   <a:srgbClr val="8A6D1E"/>
                 </a:solidFill>
                 <a:latin typeface="Amiri" pitchFamily="2" charset="-78"/>
+                <a:ea typeface="Amiri" pitchFamily="2" charset="-78"/>
                 <a:cs typeface="Amiri" pitchFamily="2" charset="-78"/>
               </a:rPr>
               <a:t>الأَكْلُ خَارِجَ البَيْتِ</a:t>
@@ -17605,6 +17740,7 @@
                   <a:srgbClr val="1B3B6F"/>
                 </a:solidFill>
                 <a:latin typeface="Amiri" pitchFamily="2" charset="-78"/>
+                <a:ea typeface="Amiri" pitchFamily="2" charset="-78"/>
                 <a:cs typeface="Amiri" pitchFamily="2" charset="-78"/>
               </a:rPr>
               <a:t>مَطْعَمِي المُفَضَّلُ … وَالطَّعَامُ فِيهِ …</a:t>
@@ -17681,6 +17817,7 @@
                   <a:srgbClr val="1B3B6F"/>
                 </a:solidFill>
                 <a:latin typeface="Amiri" pitchFamily="2" charset="-78"/>
+                <a:ea typeface="Amiri" pitchFamily="2" charset="-78"/>
                 <a:cs typeface="Amiri" pitchFamily="2" charset="-78"/>
               </a:rPr>
               <a:t>صِفْ مَطْعَمَكَ المُفَضَّلَ.</a:t>
@@ -17784,6 +17921,7 @@
                   <a:srgbClr val="1B3B6F"/>
                 </a:solidFill>
                 <a:latin typeface="Amiri" pitchFamily="2" charset="-78"/>
+                <a:ea typeface="Amiri" pitchFamily="2" charset="-78"/>
                 <a:cs typeface="Amiri" pitchFamily="2" charset="-78"/>
               </a:rPr>
               <a:t>أَطْلُبُ … أَوَّلًا، ثُمَّ …</a:t>
@@ -17860,6 +17998,7 @@
                   <a:srgbClr val="1B3B6F"/>
                 </a:solidFill>
                 <a:latin typeface="Amiri" pitchFamily="2" charset="-78"/>
+                <a:ea typeface="Amiri" pitchFamily="2" charset="-78"/>
                 <a:cs typeface="Amiri" pitchFamily="2" charset="-78"/>
               </a:rPr>
               <a:t>مَاذَا تَطْلُبُ فِي مَطْعَمٍ عَرَبِيٍّ؟</a:t>
@@ -17963,6 +18102,7 @@
                   <a:srgbClr val="1B3B6F"/>
                 </a:solidFill>
                 <a:latin typeface="Amiri" pitchFamily="2" charset="-78"/>
+                <a:ea typeface="Amiri" pitchFamily="2" charset="-78"/>
                 <a:cs typeface="Amiri" pitchFamily="2" charset="-78"/>
               </a:rPr>
               <a:t>أُفَضِّلُ … لِأَنَّهُ … لٰكِنَّ …</a:t>
@@ -18039,6 +18179,7 @@
                   <a:srgbClr val="1B3B6F"/>
                 </a:solidFill>
                 <a:latin typeface="Amiri" pitchFamily="2" charset="-78"/>
+                <a:ea typeface="Amiri" pitchFamily="2" charset="-78"/>
                 <a:cs typeface="Amiri" pitchFamily="2" charset="-78"/>
               </a:rPr>
               <a:t>هَلْ تُفَضِّلُ الأَكْلَ فِي المَطْعَمِ أَمْ فِي البَيْتِ؟</a:t>
@@ -18142,6 +18283,7 @@
                   <a:srgbClr val="1B3B6F"/>
                 </a:solidFill>
                 <a:latin typeface="Amiri" pitchFamily="2" charset="-78"/>
+                <a:ea typeface="Amiri" pitchFamily="2" charset="-78"/>
                 <a:cs typeface="Amiri" pitchFamily="2" charset="-78"/>
               </a:rPr>
               <a:t>ذَهَبْتُ … وَأَكَلْتُ …</a:t>
@@ -18218,6 +18360,7 @@
                   <a:srgbClr val="1B3B6F"/>
                 </a:solidFill>
                 <a:latin typeface="Amiri" pitchFamily="2" charset="-78"/>
+                <a:ea typeface="Amiri" pitchFamily="2" charset="-78"/>
                 <a:cs typeface="Amiri" pitchFamily="2" charset="-78"/>
               </a:rPr>
               <a:t>مَتَى ذَهَبْتَ إِلَى مَطْعَمٍ آخِرَ مَرَّةٍ؟</a:t>
@@ -18321,6 +18464,7 @@
                   <a:srgbClr val="1B3B6F"/>
                 </a:solidFill>
                 <a:latin typeface="Amiri" pitchFamily="2" charset="-78"/>
+                <a:ea typeface="Amiri" pitchFamily="2" charset="-78"/>
                 <a:cs typeface="Amiri" pitchFamily="2" charset="-78"/>
               </a:rPr>
               <a:t>أَدْفَعُ عَادَةً … جُنَيْهَاتٍ</a:t>
@@ -18397,6 +18541,7 @@
                   <a:srgbClr val="1B3B6F"/>
                 </a:solidFill>
                 <a:latin typeface="Amiri" pitchFamily="2" charset="-78"/>
+                <a:ea typeface="Amiri" pitchFamily="2" charset="-78"/>
                 <a:cs typeface="Amiri" pitchFamily="2" charset="-78"/>
               </a:rPr>
               <a:t>كَمْ تَدْفَعُ عَادَةً فِي المَقْهَى؟</a:t>
@@ -18606,6 +18751,7 @@
                   <a:srgbClr val="D4AF37"/>
                 </a:solidFill>
                 <a:latin typeface="Amiri" pitchFamily="2" charset="-78"/>
+                <a:ea typeface="Amiri" pitchFamily="2" charset="-78"/>
                 <a:cs typeface="Amiri" pitchFamily="2" charset="-78"/>
               </a:rPr>
               <a:t>م</a:t>
@@ -18926,6 +19072,7 @@
                   <a:srgbClr val="8A6D1E"/>
                 </a:solidFill>
                 <a:latin typeface="Amiri" pitchFamily="2" charset="-78"/>
+                <a:ea typeface="Amiri" pitchFamily="2" charset="-78"/>
                 <a:cs typeface="Amiri" pitchFamily="2" charset="-78"/>
               </a:rPr>
               <a:t>ثَقَافَةُ المَطَاعِمِ</a:t>
@@ -19206,6 +19353,7 @@
                   <a:srgbClr val="1B3B6F"/>
                 </a:solidFill>
                 <a:latin typeface="Amiri" pitchFamily="2" charset="-78"/>
+                <a:ea typeface="Amiri" pitchFamily="2" charset="-78"/>
                 <a:cs typeface="Amiri" pitchFamily="2" charset="-78"/>
               </a:rPr>
               <a:t>أَعْتَقِدُ أَنَّ … أَهَمُّ مِنْ … لِأَنَّ …</a:t>
@@ -19282,6 +19430,7 @@
                   <a:srgbClr val="1B3B6F"/>
                 </a:solidFill>
                 <a:latin typeface="Amiri" pitchFamily="2" charset="-78"/>
+                <a:ea typeface="Amiri" pitchFamily="2" charset="-78"/>
                 <a:cs typeface="Amiri" pitchFamily="2" charset="-78"/>
               </a:rPr>
               <a:t>مَا الَّذِي يَجْعَلُ المَطْعَمَ نَاجِحًا فِي رَأْيِكَ؟</a:t>
@@ -19385,6 +19534,7 @@
                   <a:srgbClr val="1B3B6F"/>
                 </a:solidFill>
                 <a:latin typeface="Amiri" pitchFamily="2" charset="-78"/>
+                <a:ea typeface="Amiri" pitchFamily="2" charset="-78"/>
                 <a:cs typeface="Amiri" pitchFamily="2" charset="-78"/>
               </a:rPr>
               <a:t>بَيْنَمَا يَشْرَبُ النَّاسُ هُنَا … يَجْلِسُ …</a:t>
@@ -19461,6 +19611,7 @@
                   <a:srgbClr val="1B3B6F"/>
                 </a:solidFill>
                 <a:latin typeface="Amiri" pitchFamily="2" charset="-78"/>
+                <a:ea typeface="Amiri" pitchFamily="2" charset="-78"/>
                 <a:cs typeface="Amiri" pitchFamily="2" charset="-78"/>
               </a:rPr>
               <a:t>قَارِنْ بَيْنَ المَقَاهِي هُنَا وَفِي البُلْدَانِ العَرَبِيَّةِ.</a:t>
@@ -19564,6 +19715,7 @@
                   <a:srgbClr val="1B3B6F"/>
                 </a:solidFill>
                 <a:latin typeface="Amiri" pitchFamily="2" charset="-78"/>
+                <a:ea typeface="Amiri" pitchFamily="2" charset="-78"/>
                 <a:cs typeface="Amiri" pitchFamily="2" charset="-78"/>
               </a:rPr>
               <a:t>مَرَّةً طَلَبْتُ … فَأَحْضَرَ …</a:t>
@@ -19640,6 +19792,7 @@
                   <a:srgbClr val="1B3B6F"/>
                 </a:solidFill>
                 <a:latin typeface="Amiri" pitchFamily="2" charset="-78"/>
+                <a:ea typeface="Amiri" pitchFamily="2" charset="-78"/>
                 <a:cs typeface="Amiri" pitchFamily="2" charset="-78"/>
               </a:rPr>
               <a:t>صِفْ مُشْكِلَةً حَدَثَتْ لَكَ فِي مَطْعَمٍ.</a:t>
@@ -19743,6 +19896,7 @@
                   <a:srgbClr val="1B3B6F"/>
                 </a:solidFill>
                 <a:latin typeface="Amiri" pitchFamily="2" charset="-78"/>
+                <a:ea typeface="Amiri" pitchFamily="2" charset="-78"/>
                 <a:cs typeface="Amiri" pitchFamily="2" charset="-78"/>
               </a:rPr>
               <a:t>أَرَى أَنَّ … إِذَا … لِأَنَّ …</a:t>
@@ -19819,6 +19973,7 @@
                   <a:srgbClr val="1B3B6F"/>
                 </a:solidFill>
                 <a:latin typeface="Amiri" pitchFamily="2" charset="-78"/>
+                <a:ea typeface="Amiri" pitchFamily="2" charset="-78"/>
                 <a:cs typeface="Amiri" pitchFamily="2" charset="-78"/>
               </a:rPr>
               <a:t>هَلْ يَجِبُ أَنْ نَتْرُكَ إِكْرَامِيَّةً لِلنَّادِلِ؟</a:t>
@@ -19922,6 +20077,7 @@
                   <a:srgbClr val="1B3B6F"/>
                 </a:solidFill>
                 <a:latin typeface="Amiri" pitchFamily="2" charset="-78"/>
+                <a:ea typeface="Amiri" pitchFamily="2" charset="-78"/>
                 <a:cs typeface="Amiri" pitchFamily="2" charset="-78"/>
               </a:rPr>
               <a:t>لَوْ فَتَحْتُ مَقْهًى، لَجَعَلْتُهُ …</a:t>
@@ -19998,6 +20154,7 @@
                   <a:srgbClr val="1B3B6F"/>
                 </a:solidFill>
                 <a:latin typeface="Amiri" pitchFamily="2" charset="-78"/>
+                <a:ea typeface="Amiri" pitchFamily="2" charset="-78"/>
                 <a:cs typeface="Amiri" pitchFamily="2" charset="-78"/>
               </a:rPr>
               <a:t>لَوْ فَتَحْتَ مَقْهًى، كَيْفَ تَجْعَلُهُ مُمَيَّزًا؟</a:t>
@@ -20207,6 +20364,7 @@
                   <a:srgbClr val="D4AF37"/>
                 </a:solidFill>
                 <a:latin typeface="Amiri" pitchFamily="2" charset="-78"/>
+                <a:ea typeface="Amiri" pitchFamily="2" charset="-78"/>
                 <a:cs typeface="Amiri" pitchFamily="2" charset="-78"/>
               </a:rPr>
               <a:t>م</a:t>
@@ -20527,6 +20685,7 @@
                   <a:srgbClr val="8A6D1E"/>
                 </a:solidFill>
                 <a:latin typeface="Amiri" pitchFamily="2" charset="-78"/>
+                <a:ea typeface="Amiri" pitchFamily="2" charset="-78"/>
                 <a:cs typeface="Amiri" pitchFamily="2" charset="-78"/>
               </a:rPr>
               <a:t>آدَابُ الصَّفِّ</a:t>
@@ -22058,6 +22217,7 @@
                   <a:srgbClr val="D4AF37"/>
                 </a:solidFill>
                 <a:latin typeface="Amiri" pitchFamily="2" charset="-78"/>
+                <a:ea typeface="Amiri" pitchFamily="2" charset="-78"/>
                 <a:cs typeface="Amiri" pitchFamily="2" charset="-78"/>
               </a:rPr>
               <a:t>م</a:t>
@@ -22378,6 +22538,7 @@
                   <a:srgbClr val="8A6D1E"/>
                 </a:solidFill>
                 <a:latin typeface="Amiri" pitchFamily="2" charset="-78"/>
+                <a:ea typeface="Amiri" pitchFamily="2" charset="-78"/>
                 <a:cs typeface="Amiri" pitchFamily="2" charset="-78"/>
               </a:rPr>
               <a:t>نَمُوذَجُ الإِجَابَةِ</a:t>
@@ -22620,6 +22781,7 @@
                   <a:srgbClr val="1B3B6F"/>
                 </a:solidFill>
                 <a:latin typeface="Amiri" pitchFamily="2" charset="-78"/>
+                <a:ea typeface="Amiri" pitchFamily="2" charset="-78"/>
                 <a:cs typeface="Amiri" pitchFamily="2" charset="-78"/>
               </a:rPr>
               <a:t>نَعَمْ، أَذْهَبُ إِلَى المَطْعَمِ مَرَّةً فِي الشَّهْرِ.</a:t>
@@ -22696,6 +22858,7 @@
                   <a:srgbClr val="1B3B6F"/>
                 </a:solidFill>
                 <a:latin typeface="Amiri" pitchFamily="2" charset="-78"/>
+                <a:ea typeface="Amiri" pitchFamily="2" charset="-78"/>
                 <a:cs typeface="Amiri" pitchFamily="2" charset="-78"/>
               </a:rPr>
               <a:t>هَلْ تَذْهَبُ إِلَى المَطْعَمِ كَثِيرًا؟</a:t>
@@ -22799,6 +22962,7 @@
                   <a:srgbClr val="1B3B6F"/>
                 </a:solidFill>
                 <a:latin typeface="Amiri" pitchFamily="2" charset="-78"/>
+                <a:ea typeface="Amiri" pitchFamily="2" charset="-78"/>
                 <a:cs typeface="Amiri" pitchFamily="2" charset="-78"/>
               </a:rPr>
               <a:t>أَطْلُبُ عَادَةً عَصِيرَ فَرَاوِلَةٍ وَكَعْكَةً.</a:t>
@@ -22875,6 +23039,7 @@
                   <a:srgbClr val="1B3B6F"/>
                 </a:solidFill>
                 <a:latin typeface="Amiri" pitchFamily="2" charset="-78"/>
+                <a:ea typeface="Amiri" pitchFamily="2" charset="-78"/>
                 <a:cs typeface="Amiri" pitchFamily="2" charset="-78"/>
               </a:rPr>
               <a:t>مَاذَا تَطْلُبُ عَادَةً فِي المَقْهَى؟</a:t>
@@ -22978,6 +23143,7 @@
                   <a:srgbClr val="1B3B6F"/>
                 </a:solidFill>
                 <a:latin typeface="Amiri" pitchFamily="2" charset="-78"/>
+                <a:ea typeface="Amiri" pitchFamily="2" charset="-78"/>
                 <a:cs typeface="Amiri" pitchFamily="2" charset="-78"/>
               </a:rPr>
               <a:t>مَطْعَمِي المُفَضَّلُ مَطْعَمٌ إِيطَالِيٌّ قَرِيبٌ مِنْ بَيْتِي.</a:t>
@@ -23054,6 +23220,7 @@
                   <a:srgbClr val="1B3B6F"/>
                 </a:solidFill>
                 <a:latin typeface="Amiri" pitchFamily="2" charset="-78"/>
+                <a:ea typeface="Amiri" pitchFamily="2" charset="-78"/>
                 <a:cs typeface="Amiri" pitchFamily="2" charset="-78"/>
               </a:rPr>
               <a:t>مَا مَطْعَمُكَ المُفَضَّلُ؟</a:t>
@@ -23157,6 +23324,7 @@
                   <a:srgbClr val="1B3B6F"/>
                 </a:solidFill>
                 <a:latin typeface="Amiri" pitchFamily="2" charset="-78"/>
+                <a:ea typeface="Amiri" pitchFamily="2" charset="-78"/>
                 <a:cs typeface="Amiri" pitchFamily="2" charset="-78"/>
               </a:rPr>
               <a:t>أَذْهَبُ مَعَ أُسْرَتِي أَوْ مَعَ أَصْدِقَائِي.</a:t>
@@ -23233,6 +23401,7 @@
                   <a:srgbClr val="1B3B6F"/>
                 </a:solidFill>
                 <a:latin typeface="Amiri" pitchFamily="2" charset="-78"/>
+                <a:ea typeface="Amiri" pitchFamily="2" charset="-78"/>
                 <a:cs typeface="Amiri" pitchFamily="2" charset="-78"/>
               </a:rPr>
               <a:t>مَعَ مَنْ تَذْهَبُ؟</a:t>
@@ -23336,6 +23505,7 @@
                   <a:srgbClr val="1B3B6F"/>
                 </a:solidFill>
                 <a:latin typeface="Amiri" pitchFamily="2" charset="-78"/>
+                <a:ea typeface="Amiri" pitchFamily="2" charset="-78"/>
                 <a:cs typeface="Amiri" pitchFamily="2" charset="-78"/>
               </a:rPr>
               <a:t>نَعَمْ، بَعْضُ المَطَاعِمِ غَالِيَةٌ جِدًّا.</a:t>
@@ -23412,6 +23582,7 @@
                   <a:srgbClr val="1B3B6F"/>
                 </a:solidFill>
                 <a:latin typeface="Amiri" pitchFamily="2" charset="-78"/>
+                <a:ea typeface="Amiri" pitchFamily="2" charset="-78"/>
                 <a:cs typeface="Amiri" pitchFamily="2" charset="-78"/>
               </a:rPr>
               <a:t>هَلِ المَطَاعِمُ غَالِيَةٌ؟</a:t>
@@ -23621,6 +23792,7 @@
                   <a:srgbClr val="D4AF37"/>
                 </a:solidFill>
                 <a:latin typeface="Amiri" pitchFamily="2" charset="-78"/>
+                <a:ea typeface="Amiri" pitchFamily="2" charset="-78"/>
                 <a:cs typeface="Amiri" pitchFamily="2" charset="-78"/>
               </a:rPr>
               <a:t>م</a:t>
@@ -23941,6 +24113,7 @@
                   <a:srgbClr val="8A6D1E"/>
                 </a:solidFill>
                 <a:latin typeface="Amiri" pitchFamily="2" charset="-78"/>
+                <a:ea typeface="Amiri" pitchFamily="2" charset="-78"/>
                 <a:cs typeface="Amiri" pitchFamily="2" charset="-78"/>
               </a:rPr>
               <a:t>نَمُوذَجُ الإِجَابَةِ</a:t>
@@ -24183,6 +24356,7 @@
                   <a:srgbClr val="1B3B6F"/>
                 </a:solidFill>
                 <a:latin typeface="Amiri" pitchFamily="2" charset="-78"/>
+                <a:ea typeface="Amiri" pitchFamily="2" charset="-78"/>
                 <a:cs typeface="Amiri" pitchFamily="2" charset="-78"/>
               </a:rPr>
               <a:t>مَطْعَمِي المُفَضَّلُ صَغِيرٌ وَهَادِئٌ، وَالطَّعَامُ فِيهِ لَذِيذٌ، وَالأَسْعَارُ مَعْقُولَةٌ.</a:t>
@@ -24259,6 +24433,7 @@
                   <a:srgbClr val="1B3B6F"/>
                 </a:solidFill>
                 <a:latin typeface="Amiri" pitchFamily="2" charset="-78"/>
+                <a:ea typeface="Amiri" pitchFamily="2" charset="-78"/>
                 <a:cs typeface="Amiri" pitchFamily="2" charset="-78"/>
               </a:rPr>
               <a:t>صِفْ مَطْعَمَكَ المُفَضَّلَ.</a:t>
@@ -24362,6 +24537,7 @@
                   <a:srgbClr val="1B3B6F"/>
                 </a:solidFill>
                 <a:latin typeface="Amiri" pitchFamily="2" charset="-78"/>
+                <a:ea typeface="Amiri" pitchFamily="2" charset="-78"/>
                 <a:cs typeface="Amiri" pitchFamily="2" charset="-78"/>
               </a:rPr>
               <a:t>أَطْلُبُ الحُمُّصَ وَالفَلَافِلَ أَوَّلًا، ثُمَّ أَطْلُبُ المَشَاوِيَ.</a:t>
@@ -24438,6 +24614,7 @@
                   <a:srgbClr val="1B3B6F"/>
                 </a:solidFill>
                 <a:latin typeface="Amiri" pitchFamily="2" charset="-78"/>
+                <a:ea typeface="Amiri" pitchFamily="2" charset="-78"/>
                 <a:cs typeface="Amiri" pitchFamily="2" charset="-78"/>
               </a:rPr>
               <a:t>مَاذَا تَطْلُبُ فِي مَطْعَمٍ عَرَبِيٍّ؟</a:t>
@@ -24541,6 +24718,7 @@
                   <a:srgbClr val="1B3B6F"/>
                 </a:solidFill>
                 <a:latin typeface="Amiri" pitchFamily="2" charset="-78"/>
+                <a:ea typeface="Amiri" pitchFamily="2" charset="-78"/>
                 <a:cs typeface="Amiri" pitchFamily="2" charset="-78"/>
               </a:rPr>
               <a:t>أُفَضِّلُ الأَكْلَ فِي البَيْتِ لِأَنَّهُ أَرْخَصُ وَأَصَحُّ، لٰكِنَّ المَطْعَمَ مُمْتِعٌ فِي المُنَاسَبَاتِ.</a:t>
@@ -24617,6 +24795,7 @@
                   <a:srgbClr val="1B3B6F"/>
                 </a:solidFill>
                 <a:latin typeface="Amiri" pitchFamily="2" charset="-78"/>
+                <a:ea typeface="Amiri" pitchFamily="2" charset="-78"/>
                 <a:cs typeface="Amiri" pitchFamily="2" charset="-78"/>
               </a:rPr>
               <a:t>هَلْ تُفَضِّلُ الأَكْلَ فِي المَطْعَمِ أَمْ فِي البَيْتِ؟</a:t>
@@ -24720,6 +24899,7 @@
                   <a:srgbClr val="1B3B6F"/>
                 </a:solidFill>
                 <a:latin typeface="Amiri" pitchFamily="2" charset="-78"/>
+                <a:ea typeface="Amiri" pitchFamily="2" charset="-78"/>
                 <a:cs typeface="Amiri" pitchFamily="2" charset="-78"/>
               </a:rPr>
               <a:t>ذَهَبْتُ الأُسْبُوعَ المَاضِيَ مَعَ أُسْرَتِي، وَأَكَلْتُ سَمَكًا مَشْوِيًّا.</a:t>
@@ -24796,6 +24976,7 @@
                   <a:srgbClr val="1B3B6F"/>
                 </a:solidFill>
                 <a:latin typeface="Amiri" pitchFamily="2" charset="-78"/>
+                <a:ea typeface="Amiri" pitchFamily="2" charset="-78"/>
                 <a:cs typeface="Amiri" pitchFamily="2" charset="-78"/>
               </a:rPr>
               <a:t>مَتَى ذَهَبْتَ إِلَى مَطْعَمٍ آخِرَ مَرَّةٍ؟</a:t>
@@ -24899,6 +25080,7 @@
                   <a:srgbClr val="1B3B6F"/>
                 </a:solidFill>
                 <a:latin typeface="Amiri" pitchFamily="2" charset="-78"/>
+                <a:ea typeface="Amiri" pitchFamily="2" charset="-78"/>
                 <a:cs typeface="Amiri" pitchFamily="2" charset="-78"/>
               </a:rPr>
               <a:t>أَدْفَعُ عَادَةً خَمْسَةَ جُنَيْهَاتٍ تَقْرِيبًا ثَمَنَ عَصِيرٍ وَكَعْكَةٍ.</a:t>
@@ -24975,6 +25157,7 @@
                   <a:srgbClr val="1B3B6F"/>
                 </a:solidFill>
                 <a:latin typeface="Amiri" pitchFamily="2" charset="-78"/>
+                <a:ea typeface="Amiri" pitchFamily="2" charset="-78"/>
                 <a:cs typeface="Amiri" pitchFamily="2" charset="-78"/>
               </a:rPr>
               <a:t>كَمْ تَدْفَعُ عَادَةً فِي المَقْهَى؟</a:t>
@@ -25184,6 +25367,7 @@
                   <a:srgbClr val="D4AF37"/>
                 </a:solidFill>
                 <a:latin typeface="Amiri" pitchFamily="2" charset="-78"/>
+                <a:ea typeface="Amiri" pitchFamily="2" charset="-78"/>
                 <a:cs typeface="Amiri" pitchFamily="2" charset="-78"/>
               </a:rPr>
               <a:t>م</a:t>
@@ -25504,6 +25688,7 @@
                   <a:srgbClr val="8A6D1E"/>
                 </a:solidFill>
                 <a:latin typeface="Amiri" pitchFamily="2" charset="-78"/>
+                <a:ea typeface="Amiri" pitchFamily="2" charset="-78"/>
                 <a:cs typeface="Amiri" pitchFamily="2" charset="-78"/>
               </a:rPr>
               <a:t>نَمُوذَجُ الإِجَابَةِ</a:t>
@@ -25746,6 +25931,7 @@
                   <a:srgbClr val="1B3B6F"/>
                 </a:solidFill>
                 <a:latin typeface="Amiri" pitchFamily="2" charset="-78"/>
+                <a:ea typeface="Amiri" pitchFamily="2" charset="-78"/>
                 <a:cs typeface="Amiri" pitchFamily="2" charset="-78"/>
               </a:rPr>
               <a:t>أَعْتَقِدُ أَنَّ الطَّعَامَ الطَّازَجَ وَالخِدْمَةَ اللَّطِيفَةَ أَهَمُّ مِنَ المَكَانِ الفَاخِرِ، لِأَنَّ الزَّبُونَ يَرْجِعُ إِذَا شَعَرَ بِالتَّرْحِيبِ.</a:t>
@@ -25822,6 +26008,7 @@
                   <a:srgbClr val="1B3B6F"/>
                 </a:solidFill>
                 <a:latin typeface="Amiri" pitchFamily="2" charset="-78"/>
+                <a:ea typeface="Amiri" pitchFamily="2" charset="-78"/>
                 <a:cs typeface="Amiri" pitchFamily="2" charset="-78"/>
               </a:rPr>
               <a:t>مَا الَّذِي يَجْعَلُ المَطْعَمَ نَاجِحًا فِي رَأْيِكَ؟</a:t>
@@ -25925,6 +26112,7 @@
                   <a:srgbClr val="1B3B6F"/>
                 </a:solidFill>
                 <a:latin typeface="Amiri" pitchFamily="2" charset="-78"/>
+                <a:ea typeface="Amiri" pitchFamily="2" charset="-78"/>
                 <a:cs typeface="Amiri" pitchFamily="2" charset="-78"/>
               </a:rPr>
               <a:t>بَيْنَمَا يَشْرَبُ النَّاسُ هُنَا القَهْوَةَ بِسُرْعَةٍ قَبْلَ العَمَلِ، يَجْلِسُ النَّاسُ فِي المَقَاهِي العَرَبِيَّةِ سَاعَاتٍ يَتَحَدَّثُونَ وَيَلْعَبُونَ.</a:t>
@@ -26004,6 +26192,7 @@
                   <a:srgbClr val="1B3B6F"/>
                 </a:solidFill>
                 <a:latin typeface="Amiri" pitchFamily="2" charset="-78"/>
+                <a:ea typeface="Amiri" pitchFamily="2" charset="-78"/>
                 <a:cs typeface="Amiri" pitchFamily="2" charset="-78"/>
               </a:rPr>
               <a:t>قَارِنْ بَيْنَ المَقَاهِي هُنَا وَفِي البُلْدَانِ العَرَبِيَّةِ.</a:t>
@@ -26107,6 +26296,7 @@
                   <a:srgbClr val="1B3B6F"/>
                 </a:solidFill>
                 <a:latin typeface="Amiri" pitchFamily="2" charset="-78"/>
+                <a:ea typeface="Amiri" pitchFamily="2" charset="-78"/>
                 <a:cs typeface="Amiri" pitchFamily="2" charset="-78"/>
               </a:rPr>
               <a:t>مَرَّةً طَلَبْتُ طَبَقًا نَبَاتِيًّا، فَأَحْضَرَ النَّادِلُ طَبَقًا بِاللَّحْمِ، فَشَرَحْتُ لَهُ بِأَدَبٍ، وَغَيَّرَهُ بِسُرْعَةٍ.</a:t>
@@ -26183,6 +26373,7 @@
                   <a:srgbClr val="1B3B6F"/>
                 </a:solidFill>
                 <a:latin typeface="Amiri" pitchFamily="2" charset="-78"/>
+                <a:ea typeface="Amiri" pitchFamily="2" charset="-78"/>
                 <a:cs typeface="Amiri" pitchFamily="2" charset="-78"/>
               </a:rPr>
               <a:t>صِفْ مُشْكِلَةً حَدَثَتْ لَكَ فِي مَطْعَمٍ.</a:t>
@@ -26392,6 +26583,7 @@
                   <a:srgbClr val="D4AF37"/>
                 </a:solidFill>
                 <a:latin typeface="Amiri" pitchFamily="2" charset="-78"/>
+                <a:ea typeface="Amiri" pitchFamily="2" charset="-78"/>
                 <a:cs typeface="Amiri" pitchFamily="2" charset="-78"/>
               </a:rPr>
               <a:t>م</a:t>
@@ -26712,6 +26904,7 @@
                   <a:srgbClr val="8A6D1E"/>
                 </a:solidFill>
                 <a:latin typeface="Amiri" pitchFamily="2" charset="-78"/>
+                <a:ea typeface="Amiri" pitchFamily="2" charset="-78"/>
                 <a:cs typeface="Amiri" pitchFamily="2" charset="-78"/>
               </a:rPr>
               <a:t>نَمُوذَجُ الإِجَابَةِ</a:t>
@@ -26954,6 +27147,7 @@
                   <a:srgbClr val="1B3B6F"/>
                 </a:solidFill>
                 <a:latin typeface="Amiri" pitchFamily="2" charset="-78"/>
+                <a:ea typeface="Amiri" pitchFamily="2" charset="-78"/>
                 <a:cs typeface="Amiri" pitchFamily="2" charset="-78"/>
               </a:rPr>
               <a:t>أَرَى أَنَّ الإِكْرَامِيَّةَ فِكْرَةٌ جَيِّدَةٌ إِذَا كَانَتِ الخِدْمَةُ مُمْتَازَةً، لِأَنَّ النُّدُلَ يَعْمَلُونَ سَاعَاتٍ طَوِيلَةً.</a:t>
@@ -27030,6 +27224,7 @@
                   <a:srgbClr val="1B3B6F"/>
                 </a:solidFill>
                 <a:latin typeface="Amiri" pitchFamily="2" charset="-78"/>
+                <a:ea typeface="Amiri" pitchFamily="2" charset="-78"/>
                 <a:cs typeface="Amiri" pitchFamily="2" charset="-78"/>
               </a:rPr>
               <a:t>هَلْ يَجِبُ أَنْ نَتْرُكَ إِكْرَامِيَّةً لِلنَّادِلِ؟</a:t>
@@ -27133,6 +27328,7 @@
                   <a:srgbClr val="1B3B6F"/>
                 </a:solidFill>
                 <a:latin typeface="Amiri" pitchFamily="2" charset="-78"/>
+                <a:ea typeface="Amiri" pitchFamily="2" charset="-78"/>
                 <a:cs typeface="Amiri" pitchFamily="2" charset="-78"/>
               </a:rPr>
               <a:t>لَوْ فَتَحْتُ مَقْهًى، لَجَعَلْتُهُ مَكَانًا هَادِئًا لِلْقِرَاءَةِ، وَلَقَدَّمْتُ مَشْرُوبَاتٍ صِحِّيَّةً بِأَسْعَارٍ رَخِيصَةٍ.</a:t>
@@ -27209,6 +27405,7 @@
                   <a:srgbClr val="1B3B6F"/>
                 </a:solidFill>
                 <a:latin typeface="Amiri" pitchFamily="2" charset="-78"/>
+                <a:ea typeface="Amiri" pitchFamily="2" charset="-78"/>
                 <a:cs typeface="Amiri" pitchFamily="2" charset="-78"/>
               </a:rPr>
               <a:t>لَوْ فَتَحْتَ مَقْهًى، كَيْفَ تَجْعَلُهُ مُمَيَّزًا؟</a:t>
@@ -27418,6 +27615,7 @@
                   <a:srgbClr val="D4AF37"/>
                 </a:solidFill>
                 <a:latin typeface="Amiri" pitchFamily="2" charset="-78"/>
+                <a:ea typeface="Amiri" pitchFamily="2" charset="-78"/>
                 <a:cs typeface="Amiri" pitchFamily="2" charset="-78"/>
               </a:rPr>
               <a:t>م</a:t>
@@ -27738,6 +27936,7 @@
                   <a:srgbClr val="8A6D1E"/>
                 </a:solidFill>
                 <a:latin typeface="Amiri" pitchFamily="2" charset="-78"/>
+                <a:ea typeface="Amiri" pitchFamily="2" charset="-78"/>
                 <a:cs typeface="Amiri" pitchFamily="2" charset="-78"/>
               </a:rPr>
               <a:t>قَيِّمْ عَمَلَكَ</a:t>
@@ -28982,6 +29181,7 @@
                   <a:srgbClr val="FFFFFF"/>
                 </a:solidFill>
                 <a:latin typeface="Amiri" pitchFamily="2" charset="-78"/>
+                <a:ea typeface="Amiri" pitchFamily="2" charset="-78"/>
                 <a:cs typeface="Amiri" pitchFamily="2" charset="-78"/>
               </a:rPr>
               <a:t>أَحْسَنْتُمْ! إِلَى اللِّقَاءِ</a:t>
@@ -29134,6 +29334,7 @@
                   <a:srgbClr val="D4AF37"/>
                 </a:solidFill>
                 <a:latin typeface="Amiri" pitchFamily="2" charset="-78"/>
+                <a:ea typeface="Amiri" pitchFamily="2" charset="-78"/>
                 <a:cs typeface="Amiri" pitchFamily="2" charset="-78"/>
               </a:rPr>
               <a:t>وَرْشَةُ الكِتَابَةِ</a:t>
@@ -29267,6 +29468,7 @@
                   <a:srgbClr val="D4AF37"/>
                 </a:solidFill>
                 <a:latin typeface="Amiri" pitchFamily="2" charset="-78"/>
+                <a:ea typeface="Amiri" pitchFamily="2" charset="-78"/>
                 <a:cs typeface="Amiri" pitchFamily="2" charset="-78"/>
               </a:rPr>
               <a:t>م</a:t>
@@ -29587,6 +29789,7 @@
                   <a:srgbClr val="8A6D1E"/>
                 </a:solidFill>
                 <a:latin typeface="Amiri" pitchFamily="2" charset="-78"/>
+                <a:ea typeface="Amiri" pitchFamily="2" charset="-78"/>
                 <a:cs typeface="Amiri" pitchFamily="2" charset="-78"/>
               </a:rPr>
               <a:t>خَرِيطَةُ الوَرْشَةِ</a:t>
@@ -29901,6 +30104,7 @@
                   <a:srgbClr val="1B3B6F"/>
                 </a:solidFill>
                 <a:latin typeface="Amiri" pitchFamily="2" charset="-78"/>
+                <a:ea typeface="Amiri" pitchFamily="2" charset="-78"/>
                 <a:cs typeface="Amiri" pitchFamily="2" charset="-78"/>
               </a:rPr>
               <a:t>كَيْفَ</a:t>
@@ -30177,6 +30381,7 @@
                   <a:srgbClr val="1E6B52"/>
                 </a:solidFill>
                 <a:latin typeface="Amiri" pitchFamily="2" charset="-78"/>
+                <a:ea typeface="Amiri" pitchFamily="2" charset="-78"/>
                 <a:cs typeface="Amiri" pitchFamily="2" charset="-78"/>
               </a:rPr>
               <a:t>تَمْثِيلُ الدَّوْرِ</a:t>
@@ -30453,6 +30658,7 @@
                   <a:srgbClr val="8A6D1E"/>
                 </a:solidFill>
                 <a:latin typeface="Amiri" pitchFamily="2" charset="-78"/>
+                <a:ea typeface="Amiri" pitchFamily="2" charset="-78"/>
                 <a:cs typeface="Amiri" pitchFamily="2" charset="-78"/>
               </a:rPr>
               <a:t>النَّمُوذَجُ</a:t>
@@ -30729,6 +30935,7 @@
                   <a:srgbClr val="1E6B52"/>
                 </a:solidFill>
                 <a:latin typeface="Amiri" pitchFamily="2" charset="-78"/>
+                <a:ea typeface="Amiri" pitchFamily="2" charset="-78"/>
                 <a:cs typeface="Amiri" pitchFamily="2" charset="-78"/>
               </a:rPr>
               <a:t>المُحَادَثَةُ</a:t>
@@ -31005,6 +31212,7 @@
                   <a:srgbClr val="8A6D1E"/>
                 </a:solidFill>
                 <a:latin typeface="Amiri" pitchFamily="2" charset="-78"/>
+                <a:ea typeface="Amiri" pitchFamily="2" charset="-78"/>
                 <a:cs typeface="Amiri" pitchFamily="2" charset="-78"/>
               </a:rPr>
               <a:t>قَيِّمْ</a:t>
@@ -31248,6 +31456,7 @@
                   <a:srgbClr val="D4AF37"/>
                 </a:solidFill>
                 <a:latin typeface="Amiri" pitchFamily="2" charset="-78"/>
+                <a:ea typeface="Amiri" pitchFamily="2" charset="-78"/>
                 <a:cs typeface="Amiri" pitchFamily="2" charset="-78"/>
               </a:rPr>
               <a:t>م</a:t>
@@ -31568,6 +31777,7 @@
                   <a:srgbClr val="8A6D1E"/>
                 </a:solidFill>
                 <a:latin typeface="Amiri" pitchFamily="2" charset="-78"/>
+                <a:ea typeface="Amiri" pitchFamily="2" charset="-78"/>
                 <a:cs typeface="Amiri" pitchFamily="2" charset="-78"/>
               </a:rPr>
               <a:t>امْتِحَانُ التَّحَدُّثِ</a:t>
@@ -32192,6 +32402,7 @@
                   <a:srgbClr val="1B3B6F"/>
                 </a:solidFill>
                 <a:latin typeface="Amiri" pitchFamily="2" charset="-78"/>
+                <a:ea typeface="Amiri" pitchFamily="2" charset="-78"/>
                 <a:cs typeface="Amiri" pitchFamily="2" charset="-78"/>
               </a:rPr>
               <a:t>عَفْوًا، هَلْ يُمْكِنُ أَنْ تُعِيدَ السُّؤَالَ؟</a:t>
@@ -32291,6 +32502,7 @@
                   <a:srgbClr val="1B3B6F"/>
                 </a:solidFill>
                 <a:latin typeface="Amiri" pitchFamily="2" charset="-78"/>
+                <a:ea typeface="Amiri" pitchFamily="2" charset="-78"/>
                 <a:cs typeface="Amiri" pitchFamily="2" charset="-78"/>
               </a:rPr>
               <a:t>لَحْظَةً، دَعْنِي أُفَكِّرُ …</a:t>
@@ -32390,6 +32602,7 @@
                   <a:srgbClr val="1B3B6F"/>
                 </a:solidFill>
                 <a:latin typeface="Amiri" pitchFamily="2" charset="-78"/>
+                <a:ea typeface="Amiri" pitchFamily="2" charset="-78"/>
                 <a:cs typeface="Amiri" pitchFamily="2" charset="-78"/>
               </a:rPr>
               <a:t>أَقْصِدُ …</a:t>
@@ -32561,6 +32774,7 @@
                   <a:srgbClr val="D4AF37"/>
                 </a:solidFill>
                 <a:latin typeface="Amiri" pitchFamily="2" charset="-78"/>
+                <a:ea typeface="Amiri" pitchFamily="2" charset="-78"/>
                 <a:cs typeface="Amiri" pitchFamily="2" charset="-78"/>
               </a:rPr>
               <a:t>م</a:t>
@@ -32881,6 +33095,7 @@
                   <a:srgbClr val="8A6D1E"/>
                 </a:solidFill>
                 <a:latin typeface="Amiri" pitchFamily="2" charset="-78"/>
+                <a:ea typeface="Amiri" pitchFamily="2" charset="-78"/>
                 <a:cs typeface="Amiri" pitchFamily="2" charset="-78"/>
               </a:rPr>
               <a:t>فِي المَقْهَى</a:t>
@@ -33184,6 +33399,7 @@
                   <a:srgbClr val="1B3B6F"/>
                 </a:solidFill>
                 <a:latin typeface="Amiri" pitchFamily="2" charset="-78"/>
+                <a:ea typeface="Amiri" pitchFamily="2" charset="-78"/>
                 <a:cs typeface="Amiri" pitchFamily="2" charset="-78"/>
               </a:rPr>
               <a:t>أَطْلُبُ</a:t>
@@ -33341,6 +33557,7 @@
                   <a:srgbClr val="1B3B6F"/>
                 </a:solidFill>
                 <a:latin typeface="Amiri" pitchFamily="2" charset="-78"/>
+                <a:ea typeface="Amiri" pitchFamily="2" charset="-78"/>
                 <a:cs typeface="Amiri" pitchFamily="2" charset="-78"/>
               </a:rPr>
               <a:t>يَطْلُبُونَ</a:t>
@@ -33444,6 +33661,7 @@
                   <a:srgbClr val="1B3B6F"/>
                 </a:solidFill>
                 <a:latin typeface="Amiri" pitchFamily="2" charset="-78"/>
+                <a:ea typeface="Amiri" pitchFamily="2" charset="-78"/>
                 <a:cs typeface="Amiri" pitchFamily="2" charset="-78"/>
               </a:rPr>
               <a:t>تَطْلُبُ</a:t>
@@ -33547,6 +33765,7 @@
                   <a:srgbClr val="1B3B6F"/>
                 </a:solidFill>
                 <a:latin typeface="Amiri" pitchFamily="2" charset="-78"/>
+                <a:ea typeface="Amiri" pitchFamily="2" charset="-78"/>
                 <a:cs typeface="Amiri" pitchFamily="2" charset="-78"/>
               </a:rPr>
               <a:t>يَطْلُبُ</a:t>
@@ -33812,6 +34031,7 @@
                   <a:srgbClr val="1B3B6F"/>
                 </a:solidFill>
                 <a:latin typeface="Amiri" pitchFamily="2" charset="-78"/>
+                <a:ea typeface="Amiri" pitchFamily="2" charset="-78"/>
                 <a:cs typeface="Amiri" pitchFamily="2" charset="-78"/>
               </a:rPr>
               <a:t>أَدْفَعُ</a:t>
@@ -33969,6 +34189,7 @@
                   <a:srgbClr val="1B3B6F"/>
                 </a:solidFill>
                 <a:latin typeface="Amiri" pitchFamily="2" charset="-78"/>
+                <a:ea typeface="Amiri" pitchFamily="2" charset="-78"/>
                 <a:cs typeface="Amiri" pitchFamily="2" charset="-78"/>
               </a:rPr>
               <a:t>يَدْفَعُونَ</a:t>
@@ -34072,6 +34293,7 @@
                   <a:srgbClr val="1B3B6F"/>
                 </a:solidFill>
                 <a:latin typeface="Amiri" pitchFamily="2" charset="-78"/>
+                <a:ea typeface="Amiri" pitchFamily="2" charset="-78"/>
                 <a:cs typeface="Amiri" pitchFamily="2" charset="-78"/>
               </a:rPr>
               <a:t>تَدْفَعُ</a:t>
@@ -34175,6 +34397,7 @@
                   <a:srgbClr val="1B3B6F"/>
                 </a:solidFill>
                 <a:latin typeface="Amiri" pitchFamily="2" charset="-78"/>
+                <a:ea typeface="Amiri" pitchFamily="2" charset="-78"/>
                 <a:cs typeface="Amiri" pitchFamily="2" charset="-78"/>
               </a:rPr>
               <a:t>يَدْفَعُ</a:t>
@@ -34440,6 +34663,7 @@
                   <a:srgbClr val="1B3B6F"/>
                 </a:solidFill>
                 <a:latin typeface="Amiri" pitchFamily="2" charset="-78"/>
+                <a:ea typeface="Amiri" pitchFamily="2" charset="-78"/>
                 <a:cs typeface="Amiri" pitchFamily="2" charset="-78"/>
               </a:rPr>
               <a:t>أَحْجِزُ</a:t>
@@ -34597,6 +34821,7 @@
                   <a:srgbClr val="1B3B6F"/>
                 </a:solidFill>
                 <a:latin typeface="Amiri" pitchFamily="2" charset="-78"/>
+                <a:ea typeface="Amiri" pitchFamily="2" charset="-78"/>
                 <a:cs typeface="Amiri" pitchFamily="2" charset="-78"/>
               </a:rPr>
               <a:t>يَحْجِزُونَ</a:t>
@@ -34700,6 +34925,7 @@
                   <a:srgbClr val="1B3B6F"/>
                 </a:solidFill>
                 <a:latin typeface="Amiri" pitchFamily="2" charset="-78"/>
+                <a:ea typeface="Amiri" pitchFamily="2" charset="-78"/>
                 <a:cs typeface="Amiri" pitchFamily="2" charset="-78"/>
               </a:rPr>
               <a:t>تَحْجِزُ</a:t>
@@ -34803,6 +35029,7 @@
                   <a:srgbClr val="1B3B6F"/>
                 </a:solidFill>
                 <a:latin typeface="Amiri" pitchFamily="2" charset="-78"/>
+                <a:ea typeface="Amiri" pitchFamily="2" charset="-78"/>
                 <a:cs typeface="Amiri" pitchFamily="2" charset="-78"/>
               </a:rPr>
               <a:t>يَحْجِزُ</a:t>
@@ -35068,6 +35295,7 @@
                   <a:srgbClr val="1B3B6F"/>
                 </a:solidFill>
                 <a:latin typeface="Amiri" pitchFamily="2" charset="-78"/>
+                <a:ea typeface="Amiri" pitchFamily="2" charset="-78"/>
                 <a:cs typeface="Amiri" pitchFamily="2" charset="-78"/>
               </a:rPr>
               <a:t>أَعْطِنِي …</a:t>
@@ -35225,6 +35453,7 @@
                   <a:srgbClr val="1B3B6F"/>
                 </a:solidFill>
                 <a:latin typeface="Amiri" pitchFamily="2" charset="-78"/>
+                <a:ea typeface="Amiri" pitchFamily="2" charset="-78"/>
                 <a:cs typeface="Amiri" pitchFamily="2" charset="-78"/>
               </a:rPr>
               <a:t>أَعْطُونِي</a:t>
@@ -35328,6 +35557,7 @@
                   <a:srgbClr val="1B3B6F"/>
                 </a:solidFill>
                 <a:latin typeface="Amiri" pitchFamily="2" charset="-78"/>
+                <a:ea typeface="Amiri" pitchFamily="2" charset="-78"/>
                 <a:cs typeface="Amiri" pitchFamily="2" charset="-78"/>
               </a:rPr>
               <a:t>أَعْطِينِي</a:t>
@@ -35431,6 +35661,7 @@
                   <a:srgbClr val="1B3B6F"/>
                 </a:solidFill>
                 <a:latin typeface="Amiri" pitchFamily="2" charset="-78"/>
+                <a:ea typeface="Amiri" pitchFamily="2" charset="-78"/>
                 <a:cs typeface="Amiri" pitchFamily="2" charset="-78"/>
               </a:rPr>
               <a:t>أَعْطِنِي</a:t>
@@ -35696,6 +35927,7 @@
                   <a:srgbClr val="1B3B6F"/>
                 </a:solidFill>
                 <a:latin typeface="Amiri" pitchFamily="2" charset="-78"/>
+                <a:ea typeface="Amiri" pitchFamily="2" charset="-78"/>
                 <a:cs typeface="Amiri" pitchFamily="2" charset="-78"/>
               </a:rPr>
               <a:t>نَادِلٌ</a:t>
@@ -35853,6 +36085,7 @@
                   <a:srgbClr val="1B3B6F"/>
                 </a:solidFill>
                 <a:latin typeface="Amiri" pitchFamily="2" charset="-78"/>
+                <a:ea typeface="Amiri" pitchFamily="2" charset="-78"/>
                 <a:cs typeface="Amiri" pitchFamily="2" charset="-78"/>
               </a:rPr>
               <a:t>نُدُلٌ</a:t>
@@ -35956,6 +36189,7 @@
                   <a:srgbClr val="1B3B6F"/>
                 </a:solidFill>
                 <a:latin typeface="Amiri" pitchFamily="2" charset="-78"/>
+                <a:ea typeface="Amiri" pitchFamily="2" charset="-78"/>
                 <a:cs typeface="Amiri" pitchFamily="2" charset="-78"/>
               </a:rPr>
               <a:t>نَادِلَةٌ</a:t>
@@ -36059,6 +36293,7 @@
                   <a:srgbClr val="1B3B6F"/>
                 </a:solidFill>
                 <a:latin typeface="Amiri" pitchFamily="2" charset="-78"/>
+                <a:ea typeface="Amiri" pitchFamily="2" charset="-78"/>
                 <a:cs typeface="Amiri" pitchFamily="2" charset="-78"/>
               </a:rPr>
               <a:t>نَادِلٌ</a:t>
@@ -36324,6 +36559,7 @@
                   <a:srgbClr val="1B3B6F"/>
                 </a:solidFill>
                 <a:latin typeface="Amiri" pitchFamily="2" charset="-78"/>
+                <a:ea typeface="Amiri" pitchFamily="2" charset="-78"/>
                 <a:cs typeface="Amiri" pitchFamily="2" charset="-78"/>
               </a:rPr>
               <a:t>مَطْعَمٌ</a:t>
@@ -36481,6 +36717,7 @@
                   <a:srgbClr val="1B3B6F"/>
                 </a:solidFill>
                 <a:latin typeface="Amiri" pitchFamily="2" charset="-78"/>
+                <a:ea typeface="Amiri" pitchFamily="2" charset="-78"/>
                 <a:cs typeface="Amiri" pitchFamily="2" charset="-78"/>
               </a:rPr>
               <a:t>مَطَاعِمُ</a:t>
@@ -36584,6 +36821,7 @@
                   <a:srgbClr val="1B3B6F"/>
                 </a:solidFill>
                 <a:latin typeface="Amiri" pitchFamily="2" charset="-78"/>
+                <a:ea typeface="Amiri" pitchFamily="2" charset="-78"/>
                 <a:cs typeface="Amiri" pitchFamily="2" charset="-78"/>
               </a:rPr>
               <a:t>مَطْعَمَانِ</a:t>
@@ -36687,6 +36925,7 @@
                   <a:srgbClr val="1B3B6F"/>
                 </a:solidFill>
                 <a:latin typeface="Amiri" pitchFamily="2" charset="-78"/>
+                <a:ea typeface="Amiri" pitchFamily="2" charset="-78"/>
                 <a:cs typeface="Amiri" pitchFamily="2" charset="-78"/>
               </a:rPr>
               <a:t>مَطْعَمٌ</a:t>
@@ -36820,6 +37059,7 @@
                   <a:srgbClr val="D4AF37"/>
                 </a:solidFill>
                 <a:latin typeface="Amiri" pitchFamily="2" charset="-78"/>
+                <a:ea typeface="Amiri" pitchFamily="2" charset="-78"/>
                 <a:cs typeface="Amiri" pitchFamily="2" charset="-78"/>
               </a:rPr>
               <a:t>م</a:t>
@@ -37140,6 +37380,7 @@
                   <a:srgbClr val="8A6D1E"/>
                 </a:solidFill>
                 <a:latin typeface="Amiri" pitchFamily="2" charset="-78"/>
+                <a:ea typeface="Amiri" pitchFamily="2" charset="-78"/>
                 <a:cs typeface="Amiri" pitchFamily="2" charset="-78"/>
               </a:rPr>
               <a:t>الأَسْعَارُ</a:t>
@@ -37443,6 +37684,7 @@
                   <a:srgbClr val="1B3B6F"/>
                 </a:solidFill>
                 <a:latin typeface="Amiri" pitchFamily="2" charset="-78"/>
+                <a:ea typeface="Amiri" pitchFamily="2" charset="-78"/>
                 <a:cs typeface="Amiri" pitchFamily="2" charset="-78"/>
               </a:rPr>
               <a:t>قَائِمَةُ الطَّعَامِ</a:t>
@@ -37762,6 +38004,7 @@
                   <a:srgbClr val="1B3B6F"/>
                 </a:solidFill>
                 <a:latin typeface="Amiri" pitchFamily="2" charset="-78"/>
+                <a:ea typeface="Amiri" pitchFamily="2" charset="-78"/>
                 <a:cs typeface="Amiri" pitchFamily="2" charset="-78"/>
               </a:rPr>
               <a:t>الحِسَابُ · الفَاتُورَةُ</a:t>
@@ -37919,6 +38162,7 @@
                   <a:srgbClr val="1B3B6F"/>
                 </a:solidFill>
                 <a:latin typeface="Amiri" pitchFamily="2" charset="-78"/>
+                <a:ea typeface="Amiri" pitchFamily="2" charset="-78"/>
                 <a:cs typeface="Amiri" pitchFamily="2" charset="-78"/>
               </a:rPr>
               <a:t>فَوَاتِيرُ</a:t>
@@ -38022,6 +38266,7 @@
                   <a:srgbClr val="1B3B6F"/>
                 </a:solidFill>
                 <a:latin typeface="Amiri" pitchFamily="2" charset="-78"/>
+                <a:ea typeface="Amiri" pitchFamily="2" charset="-78"/>
                 <a:cs typeface="Amiri" pitchFamily="2" charset="-78"/>
               </a:rPr>
               <a:t>فَاتُورَةٌ</a:t>
@@ -38287,6 +38532,7 @@
                   <a:srgbClr val="1B3B6F"/>
                 </a:solidFill>
                 <a:latin typeface="Amiri" pitchFamily="2" charset="-78"/>
+                <a:ea typeface="Amiri" pitchFamily="2" charset="-78"/>
                 <a:cs typeface="Amiri" pitchFamily="2" charset="-78"/>
               </a:rPr>
               <a:t>كَمْ ثَمَنُ …؟</a:t>
@@ -38606,6 +38852,7 @@
                   <a:srgbClr val="1B3B6F"/>
                 </a:solidFill>
                 <a:latin typeface="Amiri" pitchFamily="2" charset="-78"/>
+                <a:ea typeface="Amiri" pitchFamily="2" charset="-78"/>
                 <a:cs typeface="Amiri" pitchFamily="2" charset="-78"/>
               </a:rPr>
               <a:t>دِينَارٌ</a:t>
@@ -38763,6 +39010,7 @@
                   <a:srgbClr val="1B3B6F"/>
                 </a:solidFill>
                 <a:latin typeface="Amiri" pitchFamily="2" charset="-78"/>
+                <a:ea typeface="Amiri" pitchFamily="2" charset="-78"/>
                 <a:cs typeface="Amiri" pitchFamily="2" charset="-78"/>
               </a:rPr>
               <a:t>دَنَانِيرُ</a:t>
@@ -38866,6 +39114,7 @@
                   <a:srgbClr val="1B3B6F"/>
                 </a:solidFill>
                 <a:latin typeface="Amiri" pitchFamily="2" charset="-78"/>
+                <a:ea typeface="Amiri" pitchFamily="2" charset="-78"/>
                 <a:cs typeface="Amiri" pitchFamily="2" charset="-78"/>
               </a:rPr>
               <a:t>دِينَارَانِ</a:t>
@@ -38969,6 +39218,7 @@
                   <a:srgbClr val="1B3B6F"/>
                 </a:solidFill>
                 <a:latin typeface="Amiri" pitchFamily="2" charset="-78"/>
+                <a:ea typeface="Amiri" pitchFamily="2" charset="-78"/>
                 <a:cs typeface="Amiri" pitchFamily="2" charset="-78"/>
               </a:rPr>
               <a:t>دِينَارٌ</a:t>
@@ -39234,6 +39484,7 @@
                   <a:srgbClr val="1B3B6F"/>
                 </a:solidFill>
                 <a:latin typeface="Amiri" pitchFamily="2" charset="-78"/>
+                <a:ea typeface="Amiri" pitchFamily="2" charset="-78"/>
                 <a:cs typeface="Amiri" pitchFamily="2" charset="-78"/>
               </a:rPr>
               <a:t>رَخِيصٌ</a:t>
@@ -39391,6 +39642,7 @@
                   <a:srgbClr val="1B3B6F"/>
                 </a:solidFill>
                 <a:latin typeface="Amiri" pitchFamily="2" charset="-78"/>
+                <a:ea typeface="Amiri" pitchFamily="2" charset="-78"/>
                 <a:cs typeface="Amiri" pitchFamily="2" charset="-78"/>
               </a:rPr>
               <a:t>رَخِيصَةٌ</a:t>
@@ -39494,6 +39746,7 @@
                   <a:srgbClr val="1B3B6F"/>
                 </a:solidFill>
                 <a:latin typeface="Amiri" pitchFamily="2" charset="-78"/>
+                <a:ea typeface="Amiri" pitchFamily="2" charset="-78"/>
                 <a:cs typeface="Amiri" pitchFamily="2" charset="-78"/>
               </a:rPr>
               <a:t>رَخِيصٌ</a:t>
@@ -39759,6 +40012,7 @@
                   <a:srgbClr val="1B3B6F"/>
                 </a:solidFill>
                 <a:latin typeface="Amiri" pitchFamily="2" charset="-78"/>
+                <a:ea typeface="Amiri" pitchFamily="2" charset="-78"/>
                 <a:cs typeface="Amiri" pitchFamily="2" charset="-78"/>
               </a:rPr>
               <a:t>غَالٍ</a:t>
@@ -39916,6 +40170,7 @@
                   <a:srgbClr val="1B3B6F"/>
                 </a:solidFill>
                 <a:latin typeface="Amiri" pitchFamily="2" charset="-78"/>
+                <a:ea typeface="Amiri" pitchFamily="2" charset="-78"/>
                 <a:cs typeface="Amiri" pitchFamily="2" charset="-78"/>
               </a:rPr>
               <a:t>غَالِيَةٌ</a:t>
@@ -40019,6 +40274,7 @@
                   <a:srgbClr val="1B3B6F"/>
                 </a:solidFill>
                 <a:latin typeface="Amiri" pitchFamily="2" charset="-78"/>
+                <a:ea typeface="Amiri" pitchFamily="2" charset="-78"/>
                 <a:cs typeface="Amiri" pitchFamily="2" charset="-78"/>
               </a:rPr>
               <a:t>غَالٍ</a:t>
@@ -40152,6 +40408,7 @@
                   <a:srgbClr val="D4AF37"/>
                 </a:solidFill>
                 <a:latin typeface="Amiri" pitchFamily="2" charset="-78"/>
+                <a:ea typeface="Amiri" pitchFamily="2" charset="-78"/>
                 <a:cs typeface="Amiri" pitchFamily="2" charset="-78"/>
               </a:rPr>
               <a:t>م</a:t>
@@ -40472,6 +40729,7 @@
                   <a:srgbClr val="8A6D1E"/>
                 </a:solidFill>
                 <a:latin typeface="Amiri" pitchFamily="2" charset="-78"/>
+                <a:ea typeface="Amiri" pitchFamily="2" charset="-78"/>
                 <a:cs typeface="Amiri" pitchFamily="2" charset="-78"/>
               </a:rPr>
               <a:t>فِي الغُرَفِ</a:t>
@@ -41648,6 +41906,7 @@
                   <a:srgbClr val="1B3B6F"/>
                 </a:solidFill>
                 <a:latin typeface="Amiri" pitchFamily="2" charset="-78"/>
+                <a:ea typeface="Amiri" pitchFamily="2" charset="-78"/>
                 <a:cs typeface="Amiri" pitchFamily="2" charset="-78"/>
               </a:rPr>
               <a:t>دَوْرُكَ!</a:t>
@@ -41724,6 +41983,7 @@
                   <a:srgbClr val="1B3B6F"/>
                 </a:solidFill>
                 <a:latin typeface="Amiri" pitchFamily="2" charset="-78"/>
+                <a:ea typeface="Amiri" pitchFamily="2" charset="-78"/>
                 <a:cs typeface="Amiri" pitchFamily="2" charset="-78"/>
               </a:rPr>
               <a:t>أَحْسَنْتَ! / أَحْسَنْتِ!</a:t>
@@ -41800,6 +42060,7 @@
                   <a:srgbClr val="1B3B6F"/>
                 </a:solidFill>
                 <a:latin typeface="Amiri" pitchFamily="2" charset="-78"/>
+                <a:ea typeface="Amiri" pitchFamily="2" charset="-78"/>
                 <a:cs typeface="Amiri" pitchFamily="2" charset="-78"/>
               </a:rPr>
               <a:t>تَكَلَّمْ أَكْثَرَ، مِنْ فَضْلِكَ</a:t>
@@ -41876,6 +42137,7 @@
                   <a:srgbClr val="1B3B6F"/>
                 </a:solidFill>
                 <a:latin typeface="Amiri" pitchFamily="2" charset="-78"/>
+                <a:ea typeface="Amiri" pitchFamily="2" charset="-78"/>
                 <a:cs typeface="Amiri" pitchFamily="2" charset="-78"/>
               </a:rPr>
               <a:t>لِمَاذَا؟</a:t>
@@ -42047,6 +42309,7 @@
                   <a:srgbClr val="D4AF37"/>
                 </a:solidFill>
                 <a:latin typeface="Amiri" pitchFamily="2" charset="-78"/>
+                <a:ea typeface="Amiri" pitchFamily="2" charset="-78"/>
                 <a:cs typeface="Amiri" pitchFamily="2" charset="-78"/>
               </a:rPr>
               <a:t>م</a:t>
@@ -42367,6 +42630,7 @@
                   <a:srgbClr val="8A6D1E"/>
                 </a:solidFill>
                 <a:latin typeface="Amiri" pitchFamily="2" charset="-78"/>
+                <a:ea typeface="Amiri" pitchFamily="2" charset="-78"/>
                 <a:cs typeface="Amiri" pitchFamily="2" charset="-78"/>
               </a:rPr>
               <a:t>فِي مَقْهًى فِي عَمَّانَ</a:t>
@@ -42647,6 +42911,7 @@
                   <a:srgbClr val="1B3B6F"/>
                 </a:solidFill>
                 <a:latin typeface="Amiri" pitchFamily="2" charset="-78"/>
+                <a:ea typeface="Amiri" pitchFamily="2" charset="-78"/>
                 <a:cs typeface="Amiri" pitchFamily="2" charset="-78"/>
               </a:rPr>
               <a:t>أُرِيدُ … وَ …، مِنْ فَضْلِكَ</a:t>
@@ -42723,6 +42988,7 @@
                   <a:srgbClr val="1B3B6F"/>
                 </a:solidFill>
                 <a:latin typeface="Amiri" pitchFamily="2" charset="-78"/>
+                <a:ea typeface="Amiri" pitchFamily="2" charset="-78"/>
                 <a:cs typeface="Amiri" pitchFamily="2" charset="-78"/>
               </a:rPr>
               <a:t>أَهْلًا وَسَهْلًا! مَاذَا تَطْلُبُ؟</a:t>
@@ -42891,6 +43157,7 @@
                   <a:srgbClr val="1B3B6F"/>
                 </a:solidFill>
                 <a:latin typeface="Amiri" pitchFamily="2" charset="-78"/>
+                <a:ea typeface="Amiri" pitchFamily="2" charset="-78"/>
                 <a:cs typeface="Amiri" pitchFamily="2" charset="-78"/>
               </a:rPr>
               <a:t>نَعَمْ، مِلْعَقَةً وَاحِدَةً …</a:t>
@@ -42967,6 +43234,7 @@
                   <a:srgbClr val="1B3B6F"/>
                 </a:solidFill>
                 <a:latin typeface="Amiri" pitchFamily="2" charset="-78"/>
+                <a:ea typeface="Amiri" pitchFamily="2" charset="-78"/>
                 <a:cs typeface="Amiri" pitchFamily="2" charset="-78"/>
               </a:rPr>
               <a:t>هَلْ تُرِيدُ السُّكَّرَ؟</a:t>
@@ -43135,6 +43403,7 @@
                   <a:srgbClr val="1B3B6F"/>
                 </a:solidFill>
                 <a:latin typeface="Amiri" pitchFamily="2" charset="-78"/>
+                <a:ea typeface="Amiri" pitchFamily="2" charset="-78"/>
                 <a:cs typeface="Amiri" pitchFamily="2" charset="-78"/>
               </a:rPr>
               <a:t>كَمْ ثَمَنُ …؟</a:t>
@@ -43211,6 +43480,7 @@
                   <a:srgbClr val="1B3B6F"/>
                 </a:solidFill>
                 <a:latin typeface="Amiri" pitchFamily="2" charset="-78"/>
+                <a:ea typeface="Amiri" pitchFamily="2" charset="-78"/>
                 <a:cs typeface="Amiri" pitchFamily="2" charset="-78"/>
               </a:rPr>
               <a:t>… دِينَارَانِ.</a:t>
@@ -43379,6 +43649,7 @@
                   <a:srgbClr val="1B3B6F"/>
                 </a:solidFill>
                 <a:latin typeface="Amiri" pitchFamily="2" charset="-78"/>
+                <a:ea typeface="Amiri" pitchFamily="2" charset="-78"/>
                 <a:cs typeface="Amiri" pitchFamily="2" charset="-78"/>
               </a:rPr>
               <a:t>أَجْلِسُ فِي … لِأَنَّ …</a:t>
@@ -43455,6 +43726,7 @@
                   <a:srgbClr val="1B3B6F"/>
                 </a:solidFill>
                 <a:latin typeface="Amiri" pitchFamily="2" charset="-78"/>
+                <a:ea typeface="Amiri" pitchFamily="2" charset="-78"/>
                 <a:cs typeface="Amiri" pitchFamily="2" charset="-78"/>
               </a:rPr>
               <a:t>هَلْ تَجْلِسُ فِي الدَّاخِلِ أَمْ فِي الخَارِجِ؟</a:t>
@@ -43623,6 +43895,7 @@
                   <a:srgbClr val="1B3B6F"/>
                 </a:solidFill>
                 <a:latin typeface="Amiri" pitchFamily="2" charset="-78"/>
+                <a:ea typeface="Amiri" pitchFamily="2" charset="-78"/>
                 <a:cs typeface="Amiri" pitchFamily="2" charset="-78"/>
               </a:rPr>
               <a:t>لَا، شُكْرًا. الحِسَابُ …</a:t>
@@ -43699,6 +43972,7 @@
                   <a:srgbClr val="1B3B6F"/>
                 </a:solidFill>
                 <a:latin typeface="Amiri" pitchFamily="2" charset="-78"/>
+                <a:ea typeface="Amiri" pitchFamily="2" charset="-78"/>
                 <a:cs typeface="Amiri" pitchFamily="2" charset="-78"/>
               </a:rPr>
               <a:t>هَلْ تُرِيدُ شَيْئًا آخَرَ؟</a:t>
@@ -43973,6 +44247,7 @@
                   <a:srgbClr val="D4AF37"/>
                 </a:solidFill>
                 <a:latin typeface="Amiri" pitchFamily="2" charset="-78"/>
+                <a:ea typeface="Amiri" pitchFamily="2" charset="-78"/>
                 <a:cs typeface="Amiri" pitchFamily="2" charset="-78"/>
               </a:rPr>
               <a:t>م</a:t>
@@ -44293,6 +44568,7 @@
                   <a:srgbClr val="8A6D1E"/>
                 </a:solidFill>
                 <a:latin typeface="Amiri" pitchFamily="2" charset="-78"/>
+                <a:ea typeface="Amiri" pitchFamily="2" charset="-78"/>
                 <a:cs typeface="Amiri" pitchFamily="2" charset="-78"/>
               </a:rPr>
               <a:t>حَجْزُ طَاوِلَةٍ</a:t>
@@ -44573,6 +44849,7 @@
                   <a:srgbClr val="1B3B6F"/>
                 </a:solidFill>
                 <a:latin typeface="Amiri" pitchFamily="2" charset="-78"/>
+                <a:ea typeface="Amiri" pitchFamily="2" charset="-78"/>
                 <a:cs typeface="Amiri" pitchFamily="2" charset="-78"/>
               </a:rPr>
               <a:t>أُرِيدُ أَنْ أَحْجِزَ …</a:t>
@@ -44649,6 +44926,7 @@
                   <a:srgbClr val="1B3B6F"/>
                 </a:solidFill>
                 <a:latin typeface="Amiri" pitchFamily="2" charset="-78"/>
+                <a:ea typeface="Amiri" pitchFamily="2" charset="-78"/>
                 <a:cs typeface="Amiri" pitchFamily="2" charset="-78"/>
               </a:rPr>
               <a:t>مَطْعَمُ النَّخِيلِ، تَفَضَّلْ.</a:t>
@@ -44817,6 +45095,7 @@
                   <a:srgbClr val="1B3B6F"/>
                 </a:solidFill>
                 <a:latin typeface="Amiri" pitchFamily="2" charset="-78"/>
+                <a:ea typeface="Amiri" pitchFamily="2" charset="-78"/>
                 <a:cs typeface="Amiri" pitchFamily="2" charset="-78"/>
               </a:rPr>
               <a:t>لِخَمْسَةِ أَشْخَاصٍ</a:t>
@@ -44893,6 +45172,7 @@
                   <a:srgbClr val="1B3B6F"/>
                 </a:solidFill>
                 <a:latin typeface="Amiri" pitchFamily="2" charset="-78"/>
+                <a:ea typeface="Amiri" pitchFamily="2" charset="-78"/>
                 <a:cs typeface="Amiri" pitchFamily="2" charset="-78"/>
               </a:rPr>
               <a:t>لِكَمْ شَخْصًا؟</a:t>
@@ -45061,6 +45341,7 @@
                   <a:srgbClr val="1B3B6F"/>
                 </a:solidFill>
                 <a:latin typeface="Amiri" pitchFamily="2" charset="-78"/>
+                <a:ea typeface="Amiri" pitchFamily="2" charset="-78"/>
                 <a:cs typeface="Amiri" pitchFamily="2" charset="-78"/>
               </a:rPr>
               <a:t>يَوْمَ … فِي السَّاعَةِ …</a:t>
@@ -45137,6 +45418,7 @@
                   <a:srgbClr val="1B3B6F"/>
                 </a:solidFill>
                 <a:latin typeface="Amiri" pitchFamily="2" charset="-78"/>
+                <a:ea typeface="Amiri" pitchFamily="2" charset="-78"/>
                 <a:cs typeface="Amiri" pitchFamily="2" charset="-78"/>
               </a:rPr>
               <a:t>فِي أَيِّ يَوْمٍ، وَفِي أَيِّ سَاعَةٍ؟</a:t>
@@ -45240,6 +45522,7 @@
                   <a:srgbClr val="1B3B6F"/>
                 </a:solidFill>
                 <a:latin typeface="Amiri" pitchFamily="2" charset="-78"/>
+                <a:ea typeface="Amiri" pitchFamily="2" charset="-78"/>
                 <a:cs typeface="Amiri" pitchFamily="2" charset="-78"/>
               </a:rPr>
               <a:t>هَلْ عِنْدَكُمْ …؟</a:t>
@@ -45316,6 +45599,7 @@
                   <a:srgbClr val="1B3B6F"/>
                 </a:solidFill>
                 <a:latin typeface="Amiri" pitchFamily="2" charset="-78"/>
+                <a:ea typeface="Amiri" pitchFamily="2" charset="-78"/>
                 <a:cs typeface="Amiri" pitchFamily="2" charset="-78"/>
               </a:rPr>
               <a:t>… نَعَمْ، عِنْدَنَا قَائِمَةٌ خَاصَّةٌ لِلْأَطْفَالِ.</a:t>
@@ -45419,6 +45703,7 @@
                   <a:srgbClr val="1B3B6F"/>
                 </a:solidFill>
                 <a:latin typeface="Amiri" pitchFamily="2" charset="-78"/>
+                <a:ea typeface="Amiri" pitchFamily="2" charset="-78"/>
                 <a:cs typeface="Amiri" pitchFamily="2" charset="-78"/>
               </a:rPr>
               <a:t>الحَجْزُ بِاسْمِ …</a:t>
@@ -45495,6 +45780,7 @@
                   <a:srgbClr val="1B3B6F"/>
                 </a:solidFill>
                 <a:latin typeface="Amiri" pitchFamily="2" charset="-78"/>
+                <a:ea typeface="Amiri" pitchFamily="2" charset="-78"/>
                 <a:cs typeface="Amiri" pitchFamily="2" charset="-78"/>
               </a:rPr>
               <a:t>مَا الاسْمُ، مِنْ فَضْلِكَ؟</a:t>
@@ -45669,13 +45955,9 @@
     <a:fontScheme name="Office">
       <a:majorFont>
         <a:latin typeface="Calibri Light" panose="020F0302020204030204"/>
-        <a:ea typeface=""/>
-        <a:cs typeface=""/>
-        <a:font script="Jpan" typeface="游ゴシック Light"/>
-        <a:font script="Hang" typeface="맑은 고딕"/>
-        <a:font script="Hans" typeface="等线 Light"/>
-        <a:font script="Hant" typeface="新細明體"/>
-        <a:font script="Arab" typeface="Times New Roman"/>
+        <a:ea typeface="Amiri" pitchFamily="2" charset="-78"/>
+        <a:cs typeface="Amiri" pitchFamily="2" charset="-78"/>
+        <a:font script="Arab" typeface="Amiri"/>
         <a:font script="Hebr" typeface="Times New Roman"/>
         <a:font script="Thai" typeface="Angsana New"/>
         <a:font script="Ethi" typeface="Nyala"/>
@@ -45721,13 +46003,9 @@
       </a:majorFont>
       <a:minorFont>
         <a:latin typeface="Calibri" panose="020F0502020204030204"/>
-        <a:ea typeface=""/>
-        <a:cs typeface=""/>
-        <a:font script="Jpan" typeface="游ゴシック"/>
-        <a:font script="Hang" typeface="맑은 고딕"/>
-        <a:font script="Hans" typeface="等线"/>
-        <a:font script="Hant" typeface="新細明體"/>
-        <a:font script="Arab" typeface="Arial"/>
+        <a:ea typeface="Amiri" pitchFamily="2" charset="-78"/>
+        <a:cs typeface="Amiri" pitchFamily="2" charset="-78"/>
+        <a:font script="Arab" typeface="Amiri"/>
         <a:font script="Hebr" typeface="Arial"/>
         <a:font script="Thai" typeface="Cordia New"/>
         <a:font script="Ethi" typeface="Nyala"/>
